--- a/topic-09-week9/unit-1/talk-01/HTTP.pptx
+++ b/topic-09-week9/unit-1/talk-01/HTTP.pptx
@@ -5,7 +5,7 @@
     <p:sldMasterId id="2147483660" r:id="rId1"/>
   </p:sldMasterIdLst>
   <p:notesMasterIdLst>
-    <p:notesMasterId r:id="rId28"/>
+    <p:notesMasterId r:id="rId29"/>
   </p:notesMasterIdLst>
   <p:sldIdLst>
     <p:sldId id="256" r:id="rId2"/>
@@ -23,17 +23,18 @@
     <p:sldId id="267" r:id="rId14"/>
     <p:sldId id="268" r:id="rId15"/>
     <p:sldId id="311" r:id="rId16"/>
-    <p:sldId id="295" r:id="rId17"/>
-    <p:sldId id="297" r:id="rId18"/>
-    <p:sldId id="298" r:id="rId19"/>
-    <p:sldId id="293" r:id="rId20"/>
-    <p:sldId id="292" r:id="rId21"/>
-    <p:sldId id="291" r:id="rId22"/>
-    <p:sldId id="290" r:id="rId23"/>
-    <p:sldId id="313" r:id="rId24"/>
-    <p:sldId id="314" r:id="rId25"/>
-    <p:sldId id="315" r:id="rId26"/>
-    <p:sldId id="265" r:id="rId27"/>
+    <p:sldId id="316" r:id="rId17"/>
+    <p:sldId id="317" r:id="rId18"/>
+    <p:sldId id="295" r:id="rId19"/>
+    <p:sldId id="297" r:id="rId20"/>
+    <p:sldId id="298" r:id="rId21"/>
+    <p:sldId id="293" r:id="rId22"/>
+    <p:sldId id="292" r:id="rId23"/>
+    <p:sldId id="291" r:id="rId24"/>
+    <p:sldId id="290" r:id="rId25"/>
+    <p:sldId id="313" r:id="rId26"/>
+    <p:sldId id="314" r:id="rId27"/>
+    <p:sldId id="315" r:id="rId28"/>
   </p:sldIdLst>
   <p:sldSz cx="12192000" cy="6858000"/>
   <p:notesSz cx="6858000" cy="9144000"/>
@@ -3194,7 +3195,7 @@
           <a:p>
             <a:fld id="{1F59DCBE-7903-4CC3-BA3A-6346FDFCF31A}" type="datetimeFigureOut">
               <a:rPr lang="en-US"/>
-              <a:t>11/11/2024</a:t>
+              <a:t>11/10/2025</a:t>
             </a:fld>
             <a:endParaRPr lang="en-US"/>
           </a:p>
@@ -3792,7 +3793,7 @@
           <a:p>
             <a:fld id="{71B2BC22-52B8-4A4F-B04B-16740D2D9FF3}" type="slidenum">
               <a:rPr lang="en-US" smtClean="0"/>
-              <a:t>23</a:t>
+              <a:t>25</a:t>
             </a:fld>
             <a:endParaRPr lang="en-US"/>
           </a:p>
@@ -3876,7 +3877,7 @@
           <a:p>
             <a:fld id="{71B2BC22-52B8-4A4F-B04B-16740D2D9FF3}" type="slidenum">
               <a:rPr lang="en-US" smtClean="0"/>
-              <a:t>24</a:t>
+              <a:t>26</a:t>
             </a:fld>
             <a:endParaRPr lang="en-US"/>
           </a:p>
@@ -3960,7 +3961,7 @@
           <a:p>
             <a:fld id="{71B2BC22-52B8-4A4F-B04B-16740D2D9FF3}" type="slidenum">
               <a:rPr lang="en-US" smtClean="0"/>
-              <a:t>25</a:t>
+              <a:t>27</a:t>
             </a:fld>
             <a:endParaRPr lang="en-US"/>
           </a:p>
@@ -3970,90 +3971,6 @@
     <p:extLst>
       <p:ext uri="{BB962C8B-B14F-4D97-AF65-F5344CB8AC3E}">
         <p14:creationId xmlns:p14="http://schemas.microsoft.com/office/powerpoint/2010/main" val="1631996451"/>
-      </p:ext>
-    </p:extLst>
-  </p:cSld>
-  <p:clrMapOvr>
-    <a:masterClrMapping/>
-  </p:clrMapOvr>
-</p:notes>
-</file>
-
-<file path=ppt/notesSlides/notesSlide14.xml><?xml version="1.0" encoding="utf-8"?>
-<p:notes xmlns:a="http://schemas.openxmlformats.org/drawingml/2006/main" xmlns:r="http://schemas.openxmlformats.org/officeDocument/2006/relationships" xmlns:p="http://schemas.openxmlformats.org/presentationml/2006/main">
-  <p:cSld>
-    <p:spTree>
-      <p:nvGrpSpPr>
-        <p:cNvPr id="1" name=""/>
-        <p:cNvGrpSpPr/>
-        <p:nvPr/>
-      </p:nvGrpSpPr>
-      <p:grpSpPr>
-        <a:xfrm>
-          <a:off x="0" y="0"/>
-          <a:ext cx="0" cy="0"/>
-          <a:chOff x="0" y="0"/>
-          <a:chExt cx="0" cy="0"/>
-        </a:xfrm>
-      </p:grpSpPr>
-      <p:sp>
-        <p:nvSpPr>
-          <p:cNvPr id="2" name="Slide Image Placeholder 1"/>
-          <p:cNvSpPr>
-            <a:spLocks noGrp="1" noRot="1" noChangeAspect="1"/>
-          </p:cNvSpPr>
-          <p:nvPr>
-            <p:ph type="sldImg"/>
-          </p:nvPr>
-        </p:nvSpPr>
-        <p:spPr/>
-      </p:sp>
-      <p:sp>
-        <p:nvSpPr>
-          <p:cNvPr id="3" name="Notes Placeholder 2"/>
-          <p:cNvSpPr>
-            <a:spLocks noGrp="1"/>
-          </p:cNvSpPr>
-          <p:nvPr>
-            <p:ph type="body" idx="1"/>
-          </p:nvPr>
-        </p:nvSpPr>
-        <p:spPr/>
-        <p:txBody>
-          <a:bodyPr/>
-          <a:lstStyle/>
-          <a:p>
-            <a:endParaRPr lang="en-US"/>
-          </a:p>
-        </p:txBody>
-      </p:sp>
-      <p:sp>
-        <p:nvSpPr>
-          <p:cNvPr id="4" name="Slide Number Placeholder 3"/>
-          <p:cNvSpPr>
-            <a:spLocks noGrp="1"/>
-          </p:cNvSpPr>
-          <p:nvPr>
-            <p:ph type="sldNum" sz="quarter" idx="10"/>
-          </p:nvPr>
-        </p:nvSpPr>
-        <p:spPr/>
-        <p:txBody>
-          <a:bodyPr/>
-          <a:lstStyle/>
-          <a:p>
-            <a:fld id="{71B2BC22-52B8-4A4F-B04B-16740D2D9FF3}" type="slidenum">
-              <a:rPr lang="en-US"/>
-              <a:t>26</a:t>
-            </a:fld>
-            <a:endParaRPr lang="en-US"/>
-          </a:p>
-        </p:txBody>
-      </p:sp>
-    </p:spTree>
-    <p:extLst>
-      <p:ext uri="{BB962C8B-B14F-4D97-AF65-F5344CB8AC3E}">
-        <p14:creationId xmlns:p14="http://schemas.microsoft.com/office/powerpoint/2010/main" val="3288768749"/>
       </p:ext>
     </p:extLst>
   </p:cSld>
@@ -4866,7 +4783,7 @@
           <a:p>
             <a:fld id="{846CE7D5-CF57-46EF-B807-FDD0502418D4}" type="datetimeFigureOut">
               <a:rPr lang="en-US" smtClean="0"/>
-              <a:t>11/11/2024</a:t>
+              <a:t>11/10/2025</a:t>
             </a:fld>
             <a:endParaRPr lang="en-US"/>
           </a:p>
@@ -5036,7 +4953,7 @@
           <a:p>
             <a:fld id="{846CE7D5-CF57-46EF-B807-FDD0502418D4}" type="datetimeFigureOut">
               <a:rPr lang="en-US" smtClean="0"/>
-              <a:t>11/11/2024</a:t>
+              <a:t>11/10/2025</a:t>
             </a:fld>
             <a:endParaRPr lang="en-US"/>
           </a:p>
@@ -5216,7 +5133,7 @@
           <a:p>
             <a:fld id="{846CE7D5-CF57-46EF-B807-FDD0502418D4}" type="datetimeFigureOut">
               <a:rPr lang="en-US" smtClean="0"/>
-              <a:t>11/11/2024</a:t>
+              <a:t>11/10/2025</a:t>
             </a:fld>
             <a:endParaRPr lang="en-US"/>
           </a:p>
@@ -5386,7 +5303,7 @@
           <a:p>
             <a:fld id="{846CE7D5-CF57-46EF-B807-FDD0502418D4}" type="datetimeFigureOut">
               <a:rPr lang="en-US" smtClean="0"/>
-              <a:t>11/11/2024</a:t>
+              <a:t>11/10/2025</a:t>
             </a:fld>
             <a:endParaRPr lang="en-US"/>
           </a:p>
@@ -5632,7 +5549,7 @@
           <a:p>
             <a:fld id="{846CE7D5-CF57-46EF-B807-FDD0502418D4}" type="datetimeFigureOut">
               <a:rPr lang="en-US" smtClean="0"/>
-              <a:t>11/11/2024</a:t>
+              <a:t>11/10/2025</a:t>
             </a:fld>
             <a:endParaRPr lang="en-US"/>
           </a:p>
@@ -5864,7 +5781,7 @@
           <a:p>
             <a:fld id="{846CE7D5-CF57-46EF-B807-FDD0502418D4}" type="datetimeFigureOut">
               <a:rPr lang="en-US" smtClean="0"/>
-              <a:t>11/11/2024</a:t>
+              <a:t>11/10/2025</a:t>
             </a:fld>
             <a:endParaRPr lang="en-US"/>
           </a:p>
@@ -6231,7 +6148,7 @@
           <a:p>
             <a:fld id="{846CE7D5-CF57-46EF-B807-FDD0502418D4}" type="datetimeFigureOut">
               <a:rPr lang="en-US" smtClean="0"/>
-              <a:t>11/11/2024</a:t>
+              <a:t>11/10/2025</a:t>
             </a:fld>
             <a:endParaRPr lang="en-US"/>
           </a:p>
@@ -6349,7 +6266,7 @@
           <a:p>
             <a:fld id="{846CE7D5-CF57-46EF-B807-FDD0502418D4}" type="datetimeFigureOut">
               <a:rPr lang="en-US" smtClean="0"/>
-              <a:t>11/11/2024</a:t>
+              <a:t>11/10/2025</a:t>
             </a:fld>
             <a:endParaRPr lang="en-US"/>
           </a:p>
@@ -6444,7 +6361,7 @@
           <a:p>
             <a:fld id="{846CE7D5-CF57-46EF-B807-FDD0502418D4}" type="datetimeFigureOut">
               <a:rPr lang="en-US" smtClean="0"/>
-              <a:t>11/11/2024</a:t>
+              <a:t>11/10/2025</a:t>
             </a:fld>
             <a:endParaRPr lang="en-US"/>
           </a:p>
@@ -6721,7 +6638,7 @@
           <a:p>
             <a:fld id="{846CE7D5-CF57-46EF-B807-FDD0502418D4}" type="datetimeFigureOut">
               <a:rPr lang="en-US" smtClean="0"/>
-              <a:t>11/11/2024</a:t>
+              <a:t>11/10/2025</a:t>
             </a:fld>
             <a:endParaRPr lang="en-US"/>
           </a:p>
@@ -6978,7 +6895,7 @@
           <a:p>
             <a:fld id="{846CE7D5-CF57-46EF-B807-FDD0502418D4}" type="datetimeFigureOut">
               <a:rPr lang="en-US" smtClean="0"/>
-              <a:t>11/11/2024</a:t>
+              <a:t>11/10/2025</a:t>
             </a:fld>
             <a:endParaRPr lang="en-US"/>
           </a:p>
@@ -7191,7 +7108,7 @@
           <a:p>
             <a:fld id="{846CE7D5-CF57-46EF-B807-FDD0502418D4}" type="datetimeFigureOut">
               <a:rPr lang="en-US" smtClean="0"/>
-              <a:t>11/11/2024</a:t>
+              <a:t>11/10/2025</a:t>
             </a:fld>
             <a:endParaRPr lang="en-US"/>
           </a:p>
@@ -8827,7 +8744,7 @@
                 <a:latin typeface="Calibri" charset="0"/>
                 <a:hlinkClick r:id="rId3"/>
               </a:rPr>
-              <a:t>https://www.myhome.com/heating?status=on</a:t>
+              <a:t>https://www.myhome.com/heating?key=jkfgjsdkdfhg</a:t>
             </a:r>
             <a:endParaRPr lang="en-US" dirty="0">
               <a:latin typeface="Calibri" charset="0"/>
@@ -8851,7 +8768,7 @@
                 </a:solidFill>
                 <a:latin typeface="sans-serif" charset="0"/>
               </a:rPr>
-              <a:t>The server can use the query string to execute logic associated with that resource. In this example, it could be used to set the status of the resource (heating) to true.</a:t>
+              <a:t>The server can use the query string to execute logic associated with that resource. For example, check if the key is valid</a:t>
             </a:r>
           </a:p>
           <a:p>
@@ -9289,6 +9206,1204 @@
 </file>
 
 <file path=ppt/slides/slide16.xml><?xml version="1.0" encoding="utf-8"?>
+<p:sld xmlns:a="http://schemas.openxmlformats.org/drawingml/2006/main" xmlns:r="http://schemas.openxmlformats.org/officeDocument/2006/relationships" xmlns:p="http://schemas.openxmlformats.org/presentationml/2006/main">
+  <p:cSld>
+    <p:spTree>
+      <p:nvGrpSpPr>
+        <p:cNvPr id="1" name=""/>
+        <p:cNvGrpSpPr/>
+        <p:nvPr/>
+      </p:nvGrpSpPr>
+      <p:grpSpPr>
+        <a:xfrm>
+          <a:off x="0" y="0"/>
+          <a:ext cx="0" cy="0"/>
+          <a:chOff x="0" y="0"/>
+          <a:chExt cx="0" cy="0"/>
+        </a:xfrm>
+      </p:grpSpPr>
+      <p:pic>
+        <p:nvPicPr>
+          <p:cNvPr id="7" name="Picture 6" descr="A blue and black text">
+            <a:extLst>
+              <a:ext uri="{FF2B5EF4-FFF2-40B4-BE49-F238E27FC236}">
+                <a16:creationId xmlns:a16="http://schemas.microsoft.com/office/drawing/2014/main" id="{EFF9B69B-7BD9-C66D-FE48-F245A7D13249}"/>
+              </a:ext>
+            </a:extLst>
+          </p:cNvPr>
+          <p:cNvPicPr>
+            <a:picLocks noChangeAspect="1"/>
+          </p:cNvPicPr>
+          <p:nvPr/>
+        </p:nvPicPr>
+        <p:blipFill>
+          <a:blip r:embed="rId2">
+            <a:extLst>
+              <a:ext uri="{28A0092B-C50C-407E-A947-70E740481C1C}">
+                <a14:useLocalDpi xmlns:a14="http://schemas.microsoft.com/office/drawing/2010/main" val="0"/>
+              </a:ext>
+              <a:ext uri="{837473B0-CC2E-450A-ABE3-18F120FF3D39}">
+                <a1611:picAttrSrcUrl xmlns:a1611="http://schemas.microsoft.com/office/drawing/2016/11/main" r:id="rId3"/>
+              </a:ext>
+            </a:extLst>
+          </a:blip>
+          <a:srcRect r="37981"/>
+          <a:stretch>
+            <a:fillRect/>
+          </a:stretch>
+        </p:blipFill>
+        <p:spPr>
+          <a:xfrm>
+            <a:off x="7639893" y="1179759"/>
+            <a:ext cx="4340645" cy="2698959"/>
+          </a:xfrm>
+          <a:prstGeom prst="rect">
+            <a:avLst/>
+          </a:prstGeom>
+        </p:spPr>
+      </p:pic>
+      <p:sp>
+        <p:nvSpPr>
+          <p:cNvPr id="2" name="Title 1">
+            <a:extLst>
+              <a:ext uri="{FF2B5EF4-FFF2-40B4-BE49-F238E27FC236}">
+                <a16:creationId xmlns:a16="http://schemas.microsoft.com/office/drawing/2014/main" id="{C4F82293-C6B8-DEB6-6021-40B2476A6E51}"/>
+              </a:ext>
+            </a:extLst>
+          </p:cNvPr>
+          <p:cNvSpPr>
+            <a:spLocks noGrp="1"/>
+          </p:cNvSpPr>
+          <p:nvPr>
+            <p:ph type="title"/>
+          </p:nvPr>
+        </p:nvSpPr>
+        <p:spPr/>
+        <p:txBody>
+          <a:bodyPr/>
+          <a:lstStyle/>
+          <a:p>
+            <a:r>
+              <a:rPr lang="en-IE" dirty="0" err="1"/>
+              <a:t>cURL</a:t>
+            </a:r>
+            <a:r>
+              <a:rPr lang="en-IE" dirty="0"/>
+              <a:t> - Client for URLs</a:t>
+            </a:r>
+          </a:p>
+        </p:txBody>
+      </p:sp>
+      <p:sp>
+        <p:nvSpPr>
+          <p:cNvPr id="3" name="Content Placeholder 2">
+            <a:extLst>
+              <a:ext uri="{FF2B5EF4-FFF2-40B4-BE49-F238E27FC236}">
+                <a16:creationId xmlns:a16="http://schemas.microsoft.com/office/drawing/2014/main" id="{3201973A-19E8-C873-E37D-DA55C36F2081}"/>
+              </a:ext>
+            </a:extLst>
+          </p:cNvPr>
+          <p:cNvSpPr>
+            <a:spLocks noGrp="1"/>
+          </p:cNvSpPr>
+          <p:nvPr>
+            <p:ph idx="1"/>
+          </p:nvPr>
+        </p:nvSpPr>
+        <p:spPr>
+          <a:xfrm>
+            <a:off x="838200" y="1825625"/>
+            <a:ext cx="7810041" cy="4351338"/>
+          </a:xfrm>
+        </p:spPr>
+        <p:txBody>
+          <a:bodyPr>
+            <a:normAutofit lnSpcReduction="10000"/>
+          </a:bodyPr>
+          <a:lstStyle/>
+          <a:p>
+            <a:r>
+              <a:rPr lang="en-GB" dirty="0"/>
+              <a:t>A command-line tool for transferring data using HTTP, HTTPS, and many other protocols.</a:t>
+            </a:r>
+          </a:p>
+          <a:p>
+            <a:r>
+              <a:rPr lang="en-GB" dirty="0"/>
+              <a:t>Lets you talk directly to web APIs or servers.</a:t>
+            </a:r>
+          </a:p>
+          <a:p>
+            <a:r>
+              <a:rPr lang="en-GB" dirty="0"/>
+              <a:t>Works from any terminal - no browser required.</a:t>
+            </a:r>
+          </a:p>
+          <a:p>
+            <a:r>
+              <a:rPr lang="en-GB" dirty="0"/>
+              <a:t>Great for testing IoT devices, REST APIs, and web services.</a:t>
+            </a:r>
+          </a:p>
+          <a:p>
+            <a:r>
+              <a:rPr lang="en-GB" dirty="0"/>
+              <a:t>Send GET, POST, PUT, DELETE requests.</a:t>
+            </a:r>
+            <a:br>
+              <a:rPr lang="en-GB" dirty="0"/>
+            </a:br>
+            <a:r>
+              <a:rPr lang="en-GB" dirty="0"/>
+              <a:t>Example:</a:t>
+            </a:r>
+            <a:br>
+              <a:rPr lang="en-GB" dirty="0"/>
+            </a:br>
+            <a:br>
+              <a:rPr lang="en-GB" dirty="0"/>
+            </a:br>
+            <a:endParaRPr lang="en-GB" dirty="0"/>
+          </a:p>
+        </p:txBody>
+      </p:sp>
+      <p:sp>
+        <p:nvSpPr>
+          <p:cNvPr id="8" name="TextBox 7">
+            <a:extLst>
+              <a:ext uri="{FF2B5EF4-FFF2-40B4-BE49-F238E27FC236}">
+                <a16:creationId xmlns:a16="http://schemas.microsoft.com/office/drawing/2014/main" id="{833E0361-813A-23E6-B468-D5FB4B570C67}"/>
+              </a:ext>
+            </a:extLst>
+          </p:cNvPr>
+          <p:cNvSpPr txBox="1"/>
+          <p:nvPr/>
+        </p:nvSpPr>
+        <p:spPr>
+          <a:xfrm>
+            <a:off x="9394325" y="6377459"/>
+            <a:ext cx="9752381" cy="230832"/>
+          </a:xfrm>
+          <a:prstGeom prst="rect">
+            <a:avLst/>
+          </a:prstGeom>
+          <a:noFill/>
+        </p:spPr>
+        <p:txBody>
+          <a:bodyPr wrap="square" rtlCol="0">
+            <a:spAutoFit/>
+          </a:bodyPr>
+          <a:lstStyle/>
+          <a:p>
+            <a:r>
+              <a:rPr lang="en-IE" sz="900" dirty="0">
+                <a:hlinkClick r:id="rId3" tooltip="https://kryptera.se/cure53-granskar-curl/"/>
+              </a:rPr>
+              <a:t>This Photo</a:t>
+            </a:r>
+            <a:r>
+              <a:rPr lang="en-IE" sz="900" dirty="0"/>
+              <a:t> by Unknown Author is licensed under </a:t>
+            </a:r>
+            <a:r>
+              <a:rPr lang="en-IE" sz="900" dirty="0">
+                <a:hlinkClick r:id="rId4" tooltip="https://creativecommons.org/licenses/by/3.0/"/>
+              </a:rPr>
+              <a:t>CC BY</a:t>
+            </a:r>
+            <a:endParaRPr lang="en-IE" sz="900" dirty="0"/>
+          </a:p>
+        </p:txBody>
+      </p:sp>
+      <p:pic>
+        <p:nvPicPr>
+          <p:cNvPr id="10" name="Picture 9">
+            <a:extLst>
+              <a:ext uri="{FF2B5EF4-FFF2-40B4-BE49-F238E27FC236}">
+                <a16:creationId xmlns:a16="http://schemas.microsoft.com/office/drawing/2014/main" id="{B0BE77FC-8827-F70C-F733-C614FB3C4A3D}"/>
+              </a:ext>
+            </a:extLst>
+          </p:cNvPr>
+          <p:cNvPicPr>
+            <a:picLocks noChangeAspect="1"/>
+          </p:cNvPicPr>
+          <p:nvPr/>
+        </p:nvPicPr>
+        <p:blipFill>
+          <a:blip r:embed="rId5"/>
+          <a:stretch>
+            <a:fillRect/>
+          </a:stretch>
+        </p:blipFill>
+        <p:spPr>
+          <a:xfrm>
+            <a:off x="926412" y="5200083"/>
+            <a:ext cx="9141260" cy="956316"/>
+          </a:xfrm>
+          <a:prstGeom prst="rect">
+            <a:avLst/>
+          </a:prstGeom>
+        </p:spPr>
+      </p:pic>
+    </p:spTree>
+    <p:extLst>
+      <p:ext uri="{BB962C8B-B14F-4D97-AF65-F5344CB8AC3E}">
+        <p14:creationId xmlns:p14="http://schemas.microsoft.com/office/powerpoint/2010/main" val="3375905480"/>
+      </p:ext>
+    </p:extLst>
+  </p:cSld>
+  <p:clrMapOvr>
+    <a:masterClrMapping/>
+  </p:clrMapOvr>
+</p:sld>
+</file>
+
+<file path=ppt/slides/slide17.xml><?xml version="1.0" encoding="utf-8"?>
+<p:sld xmlns:a="http://schemas.openxmlformats.org/drawingml/2006/main" xmlns:r="http://schemas.openxmlformats.org/officeDocument/2006/relationships" xmlns:p="http://schemas.openxmlformats.org/presentationml/2006/main">
+  <p:cSld>
+    <p:spTree>
+      <p:nvGrpSpPr>
+        <p:cNvPr id="1" name=""/>
+        <p:cNvGrpSpPr/>
+        <p:nvPr/>
+      </p:nvGrpSpPr>
+      <p:grpSpPr>
+        <a:xfrm>
+          <a:off x="0" y="0"/>
+          <a:ext cx="0" cy="0"/>
+          <a:chOff x="0" y="0"/>
+          <a:chExt cx="0" cy="0"/>
+        </a:xfrm>
+      </p:grpSpPr>
+      <p:sp>
+        <p:nvSpPr>
+          <p:cNvPr id="2" name="Title 1">
+            <a:extLst>
+              <a:ext uri="{FF2B5EF4-FFF2-40B4-BE49-F238E27FC236}">
+                <a16:creationId xmlns:a16="http://schemas.microsoft.com/office/drawing/2014/main" id="{DBB2EF21-7FA0-2198-748B-05343E767340}"/>
+              </a:ext>
+            </a:extLst>
+          </p:cNvPr>
+          <p:cNvSpPr>
+            <a:spLocks noGrp="1"/>
+          </p:cNvSpPr>
+          <p:nvPr>
+            <p:ph type="title"/>
+          </p:nvPr>
+        </p:nvSpPr>
+        <p:spPr/>
+        <p:txBody>
+          <a:bodyPr/>
+          <a:lstStyle/>
+          <a:p>
+            <a:r>
+              <a:rPr lang="en-IE" dirty="0" err="1"/>
+              <a:t>cURL</a:t>
+            </a:r>
+            <a:r>
+              <a:rPr lang="en-IE" dirty="0"/>
+              <a:t> Options</a:t>
+            </a:r>
+          </a:p>
+        </p:txBody>
+      </p:sp>
+      <p:graphicFrame>
+        <p:nvGraphicFramePr>
+          <p:cNvPr id="4" name="Table 3">
+            <a:extLst>
+              <a:ext uri="{FF2B5EF4-FFF2-40B4-BE49-F238E27FC236}">
+                <a16:creationId xmlns:a16="http://schemas.microsoft.com/office/drawing/2014/main" id="{1EBB090A-46CD-F91E-CA8A-7DCC21C6F9C0}"/>
+              </a:ext>
+            </a:extLst>
+          </p:cNvPr>
+          <p:cNvGraphicFramePr>
+            <a:graphicFrameLocks noGrp="1"/>
+          </p:cNvGraphicFramePr>
+          <p:nvPr>
+            <p:extLst>
+              <p:ext uri="{D42A27DB-BD31-4B8C-83A1-F6EECF244321}">
+                <p14:modId xmlns:p14="http://schemas.microsoft.com/office/powerpoint/2010/main" val="1975870359"/>
+              </p:ext>
+            </p:extLst>
+          </p:nvPr>
+        </p:nvGraphicFramePr>
+        <p:xfrm>
+          <a:off x="838200" y="1473518"/>
+          <a:ext cx="10515600" cy="3108960"/>
+        </p:xfrm>
+        <a:graphic>
+          <a:graphicData uri="http://schemas.openxmlformats.org/drawingml/2006/table">
+            <a:tbl>
+              <a:tblPr/>
+              <a:tblGrid>
+                <a:gridCol w="3505200">
+                  <a:extLst>
+                    <a:ext uri="{9D8B030D-6E8A-4147-A177-3AD203B41FA5}">
+                      <a16:colId xmlns:a16="http://schemas.microsoft.com/office/drawing/2014/main" val="181381111"/>
+                    </a:ext>
+                  </a:extLst>
+                </a:gridCol>
+                <a:gridCol w="3505200">
+                  <a:extLst>
+                    <a:ext uri="{9D8B030D-6E8A-4147-A177-3AD203B41FA5}">
+                      <a16:colId xmlns:a16="http://schemas.microsoft.com/office/drawing/2014/main" val="3903978838"/>
+                    </a:ext>
+                  </a:extLst>
+                </a:gridCol>
+                <a:gridCol w="3505200">
+                  <a:extLst>
+                    <a:ext uri="{9D8B030D-6E8A-4147-A177-3AD203B41FA5}">
+                      <a16:colId xmlns:a16="http://schemas.microsoft.com/office/drawing/2014/main" val="1629941635"/>
+                    </a:ext>
+                  </a:extLst>
+                </a:gridCol>
+              </a:tblGrid>
+              <a:tr h="0">
+                <a:tc>
+                  <a:txBody>
+                    <a:bodyPr/>
+                    <a:lstStyle/>
+                    <a:p>
+                      <a:pPr algn="l">
+                        <a:buNone/>
+                      </a:pPr>
+                      <a:r>
+                        <a:rPr lang="en-IE"/>
+                        <a:t>Option</a:t>
+                      </a:r>
+                    </a:p>
+                  </a:txBody>
+                  <a:tcPr anchor="ctr">
+                    <a:lnL>
+                      <a:noFill/>
+                    </a:lnL>
+                    <a:lnR>
+                      <a:noFill/>
+                    </a:lnR>
+                    <a:lnT>
+                      <a:noFill/>
+                    </a:lnT>
+                    <a:lnB>
+                      <a:noFill/>
+                    </a:lnB>
+                    <a:noFill/>
+                  </a:tcPr>
+                </a:tc>
+                <a:tc>
+                  <a:txBody>
+                    <a:bodyPr/>
+                    <a:lstStyle/>
+                    <a:p>
+                      <a:pPr algn="l">
+                        <a:buNone/>
+                      </a:pPr>
+                      <a:r>
+                        <a:rPr lang="en-IE"/>
+                        <a:t>Meaning</a:t>
+                      </a:r>
+                    </a:p>
+                  </a:txBody>
+                  <a:tcPr anchor="ctr">
+                    <a:lnL>
+                      <a:noFill/>
+                    </a:lnL>
+                    <a:lnR>
+                      <a:noFill/>
+                    </a:lnR>
+                    <a:lnT>
+                      <a:noFill/>
+                    </a:lnT>
+                    <a:lnB>
+                      <a:noFill/>
+                    </a:lnB>
+                    <a:noFill/>
+                  </a:tcPr>
+                </a:tc>
+                <a:tc>
+                  <a:txBody>
+                    <a:bodyPr/>
+                    <a:lstStyle/>
+                    <a:p>
+                      <a:pPr algn="l">
+                        <a:buNone/>
+                      </a:pPr>
+                      <a:r>
+                        <a:rPr lang="en-IE"/>
+                        <a:t>Example</a:t>
+                      </a:r>
+                    </a:p>
+                  </a:txBody>
+                  <a:tcPr anchor="ctr">
+                    <a:lnL>
+                      <a:noFill/>
+                    </a:lnL>
+                    <a:lnR>
+                      <a:noFill/>
+                    </a:lnR>
+                    <a:lnT>
+                      <a:noFill/>
+                    </a:lnT>
+                    <a:lnB>
+                      <a:noFill/>
+                    </a:lnB>
+                    <a:noFill/>
+                  </a:tcPr>
+                </a:tc>
+                <a:extLst>
+                  <a:ext uri="{0D108BD9-81ED-4DB2-BD59-A6C34878D82A}">
+                    <a16:rowId xmlns:a16="http://schemas.microsoft.com/office/drawing/2014/main" val="3016373841"/>
+                  </a:ext>
+                </a:extLst>
+              </a:tr>
+              <a:tr h="0">
+                <a:tc>
+                  <a:txBody>
+                    <a:bodyPr/>
+                    <a:lstStyle/>
+                    <a:p>
+                      <a:pPr algn="l">
+                        <a:buNone/>
+                      </a:pPr>
+                      <a:r>
+                        <a:rPr lang="en-IE">
+                          <a:latin typeface="Courier New" panose="02070309020205020404" pitchFamily="49" charset="0"/>
+                        </a:rPr>
+                        <a:t>-X</a:t>
+                      </a:r>
+                      <a:endParaRPr lang="en-IE"/>
+                    </a:p>
+                  </a:txBody>
+                  <a:tcPr anchor="ctr">
+                    <a:lnL>
+                      <a:noFill/>
+                    </a:lnL>
+                    <a:lnR>
+                      <a:noFill/>
+                    </a:lnR>
+                    <a:lnT>
+                      <a:noFill/>
+                    </a:lnT>
+                    <a:lnB>
+                      <a:noFill/>
+                    </a:lnB>
+                    <a:noFill/>
+                  </a:tcPr>
+                </a:tc>
+                <a:tc>
+                  <a:txBody>
+                    <a:bodyPr/>
+                    <a:lstStyle/>
+                    <a:p>
+                      <a:pPr algn="l">
+                        <a:buNone/>
+                      </a:pPr>
+                      <a:r>
+                        <a:rPr lang="en-GB"/>
+                        <a:t>Specify method (GET, POST, PUT, DELETE)</a:t>
+                      </a:r>
+                    </a:p>
+                  </a:txBody>
+                  <a:tcPr anchor="ctr">
+                    <a:lnL>
+                      <a:noFill/>
+                    </a:lnL>
+                    <a:lnR>
+                      <a:noFill/>
+                    </a:lnR>
+                    <a:lnT>
+                      <a:noFill/>
+                    </a:lnT>
+                    <a:lnB>
+                      <a:noFill/>
+                    </a:lnB>
+                    <a:noFill/>
+                  </a:tcPr>
+                </a:tc>
+                <a:tc>
+                  <a:txBody>
+                    <a:bodyPr/>
+                    <a:lstStyle/>
+                    <a:p>
+                      <a:pPr algn="l">
+                        <a:buNone/>
+                      </a:pPr>
+                      <a:r>
+                        <a:rPr lang="en-IE">
+                          <a:latin typeface="Courier New" panose="02070309020205020404" pitchFamily="49" charset="0"/>
+                        </a:rPr>
+                        <a:t>-X PUT</a:t>
+                      </a:r>
+                      <a:endParaRPr lang="en-IE"/>
+                    </a:p>
+                  </a:txBody>
+                  <a:tcPr anchor="ctr">
+                    <a:lnL>
+                      <a:noFill/>
+                    </a:lnL>
+                    <a:lnR>
+                      <a:noFill/>
+                    </a:lnR>
+                    <a:lnT>
+                      <a:noFill/>
+                    </a:lnT>
+                    <a:lnB>
+                      <a:noFill/>
+                    </a:lnB>
+                    <a:noFill/>
+                  </a:tcPr>
+                </a:tc>
+                <a:extLst>
+                  <a:ext uri="{0D108BD9-81ED-4DB2-BD59-A6C34878D82A}">
+                    <a16:rowId xmlns:a16="http://schemas.microsoft.com/office/drawing/2014/main" val="3960467409"/>
+                  </a:ext>
+                </a:extLst>
+              </a:tr>
+              <a:tr h="0">
+                <a:tc>
+                  <a:txBody>
+                    <a:bodyPr/>
+                    <a:lstStyle/>
+                    <a:p>
+                      <a:pPr algn="l">
+                        <a:buNone/>
+                      </a:pPr>
+                      <a:r>
+                        <a:rPr lang="en-IE">
+                          <a:latin typeface="Courier New" panose="02070309020205020404" pitchFamily="49" charset="0"/>
+                        </a:rPr>
+                        <a:t>-H</a:t>
+                      </a:r>
+                      <a:endParaRPr lang="en-IE"/>
+                    </a:p>
+                  </a:txBody>
+                  <a:tcPr anchor="ctr">
+                    <a:lnL>
+                      <a:noFill/>
+                    </a:lnL>
+                    <a:lnR>
+                      <a:noFill/>
+                    </a:lnR>
+                    <a:lnT>
+                      <a:noFill/>
+                    </a:lnT>
+                    <a:lnB>
+                      <a:noFill/>
+                    </a:lnB>
+                    <a:noFill/>
+                  </a:tcPr>
+                </a:tc>
+                <a:tc>
+                  <a:txBody>
+                    <a:bodyPr/>
+                    <a:lstStyle/>
+                    <a:p>
+                      <a:pPr algn="l">
+                        <a:buNone/>
+                      </a:pPr>
+                      <a:r>
+                        <a:rPr lang="en-IE"/>
+                        <a:t>Add HTTP header</a:t>
+                      </a:r>
+                    </a:p>
+                  </a:txBody>
+                  <a:tcPr anchor="ctr">
+                    <a:lnL>
+                      <a:noFill/>
+                    </a:lnL>
+                    <a:lnR>
+                      <a:noFill/>
+                    </a:lnR>
+                    <a:lnT>
+                      <a:noFill/>
+                    </a:lnT>
+                    <a:lnB>
+                      <a:noFill/>
+                    </a:lnB>
+                    <a:noFill/>
+                  </a:tcPr>
+                </a:tc>
+                <a:tc>
+                  <a:txBody>
+                    <a:bodyPr/>
+                    <a:lstStyle/>
+                    <a:p>
+                      <a:pPr algn="l">
+                        <a:buNone/>
+                      </a:pPr>
+                      <a:r>
+                        <a:rPr lang="en-IE" dirty="0">
+                          <a:latin typeface="Courier New" panose="02070309020205020404" pitchFamily="49" charset="0"/>
+                        </a:rPr>
+                        <a:t>-H "Content-Type: application/</a:t>
+                      </a:r>
+                      <a:r>
+                        <a:rPr lang="en-IE" dirty="0" err="1">
+                          <a:latin typeface="Courier New" panose="02070309020205020404" pitchFamily="49" charset="0"/>
+                        </a:rPr>
+                        <a:t>json</a:t>
+                      </a:r>
+                      <a:r>
+                        <a:rPr lang="en-IE" dirty="0">
+                          <a:latin typeface="Courier New" panose="02070309020205020404" pitchFamily="49" charset="0"/>
+                        </a:rPr>
+                        <a:t>"</a:t>
+                      </a:r>
+                      <a:endParaRPr lang="en-IE" dirty="0"/>
+                    </a:p>
+                  </a:txBody>
+                  <a:tcPr anchor="ctr">
+                    <a:lnL>
+                      <a:noFill/>
+                    </a:lnL>
+                    <a:lnR>
+                      <a:noFill/>
+                    </a:lnR>
+                    <a:lnT>
+                      <a:noFill/>
+                    </a:lnT>
+                    <a:lnB>
+                      <a:noFill/>
+                    </a:lnB>
+                    <a:noFill/>
+                  </a:tcPr>
+                </a:tc>
+                <a:extLst>
+                  <a:ext uri="{0D108BD9-81ED-4DB2-BD59-A6C34878D82A}">
+                    <a16:rowId xmlns:a16="http://schemas.microsoft.com/office/drawing/2014/main" val="3760562993"/>
+                  </a:ext>
+                </a:extLst>
+              </a:tr>
+              <a:tr h="0">
+                <a:tc>
+                  <a:txBody>
+                    <a:bodyPr/>
+                    <a:lstStyle/>
+                    <a:p>
+                      <a:pPr algn="l">
+                        <a:buNone/>
+                      </a:pPr>
+                      <a:r>
+                        <a:rPr lang="en-IE">
+                          <a:latin typeface="Courier New" panose="02070309020205020404" pitchFamily="49" charset="0"/>
+                        </a:rPr>
+                        <a:t>-d</a:t>
+                      </a:r>
+                      <a:endParaRPr lang="en-IE"/>
+                    </a:p>
+                  </a:txBody>
+                  <a:tcPr anchor="ctr">
+                    <a:lnL>
+                      <a:noFill/>
+                    </a:lnL>
+                    <a:lnR>
+                      <a:noFill/>
+                    </a:lnR>
+                    <a:lnT>
+                      <a:noFill/>
+                    </a:lnT>
+                    <a:lnB>
+                      <a:noFill/>
+                    </a:lnB>
+                    <a:noFill/>
+                  </a:tcPr>
+                </a:tc>
+                <a:tc>
+                  <a:txBody>
+                    <a:bodyPr/>
+                    <a:lstStyle/>
+                    <a:p>
+                      <a:pPr algn="l">
+                        <a:buNone/>
+                      </a:pPr>
+                      <a:r>
+                        <a:rPr lang="en-GB"/>
+                        <a:t>Send data in the request body</a:t>
+                      </a:r>
+                    </a:p>
+                  </a:txBody>
+                  <a:tcPr anchor="ctr">
+                    <a:lnL>
+                      <a:noFill/>
+                    </a:lnL>
+                    <a:lnR>
+                      <a:noFill/>
+                    </a:lnR>
+                    <a:lnT>
+                      <a:noFill/>
+                    </a:lnT>
+                    <a:lnB>
+                      <a:noFill/>
+                    </a:lnB>
+                    <a:noFill/>
+                  </a:tcPr>
+                </a:tc>
+                <a:tc>
+                  <a:txBody>
+                    <a:bodyPr/>
+                    <a:lstStyle/>
+                    <a:p>
+                      <a:pPr algn="l">
+                        <a:buNone/>
+                      </a:pPr>
+                      <a:r>
+                        <a:rPr lang="en-IE">
+                          <a:latin typeface="Courier New" panose="02070309020205020404" pitchFamily="49" charset="0"/>
+                        </a:rPr>
+                        <a:t>-d '{"state":"on"}'</a:t>
+                      </a:r>
+                      <a:endParaRPr lang="en-IE"/>
+                    </a:p>
+                  </a:txBody>
+                  <a:tcPr anchor="ctr">
+                    <a:lnL>
+                      <a:noFill/>
+                    </a:lnL>
+                    <a:lnR>
+                      <a:noFill/>
+                    </a:lnR>
+                    <a:lnT>
+                      <a:noFill/>
+                    </a:lnT>
+                    <a:lnB>
+                      <a:noFill/>
+                    </a:lnB>
+                    <a:noFill/>
+                  </a:tcPr>
+                </a:tc>
+                <a:extLst>
+                  <a:ext uri="{0D108BD9-81ED-4DB2-BD59-A6C34878D82A}">
+                    <a16:rowId xmlns:a16="http://schemas.microsoft.com/office/drawing/2014/main" val="1760746563"/>
+                  </a:ext>
+                </a:extLst>
+              </a:tr>
+              <a:tr h="0">
+                <a:tc>
+                  <a:txBody>
+                    <a:bodyPr/>
+                    <a:lstStyle/>
+                    <a:p>
+                      <a:pPr algn="l">
+                        <a:buNone/>
+                      </a:pPr>
+                      <a:r>
+                        <a:rPr lang="en-IE" dirty="0">
+                          <a:latin typeface="Courier New" panose="02070309020205020404" pitchFamily="49" charset="0"/>
+                        </a:rPr>
+                        <a:t>-</a:t>
+                      </a:r>
+                      <a:r>
+                        <a:rPr lang="en-IE" dirty="0" err="1">
+                          <a:latin typeface="Courier New" panose="02070309020205020404" pitchFamily="49" charset="0"/>
+                        </a:rPr>
+                        <a:t>i</a:t>
+                      </a:r>
+                      <a:endParaRPr lang="en-IE" dirty="0"/>
+                    </a:p>
+                  </a:txBody>
+                  <a:tcPr anchor="ctr">
+                    <a:lnL>
+                      <a:noFill/>
+                    </a:lnL>
+                    <a:lnR>
+                      <a:noFill/>
+                    </a:lnR>
+                    <a:lnT>
+                      <a:noFill/>
+                    </a:lnT>
+                    <a:lnB>
+                      <a:noFill/>
+                    </a:lnB>
+                    <a:noFill/>
+                  </a:tcPr>
+                </a:tc>
+                <a:tc>
+                  <a:txBody>
+                    <a:bodyPr/>
+                    <a:lstStyle/>
+                    <a:p>
+                      <a:pPr algn="l">
+                        <a:buNone/>
+                      </a:pPr>
+                      <a:r>
+                        <a:rPr lang="en-IE"/>
+                        <a:t>Show response headers</a:t>
+                      </a:r>
+                    </a:p>
+                  </a:txBody>
+                  <a:tcPr anchor="ctr">
+                    <a:lnL>
+                      <a:noFill/>
+                    </a:lnL>
+                    <a:lnR>
+                      <a:noFill/>
+                    </a:lnR>
+                    <a:lnT>
+                      <a:noFill/>
+                    </a:lnT>
+                    <a:lnB>
+                      <a:noFill/>
+                    </a:lnB>
+                    <a:noFill/>
+                  </a:tcPr>
+                </a:tc>
+                <a:tc>
+                  <a:txBody>
+                    <a:bodyPr/>
+                    <a:lstStyle/>
+                    <a:p>
+                      <a:pPr algn="l">
+                        <a:buNone/>
+                      </a:pPr>
+                      <a:r>
+                        <a:rPr lang="en-IE">
+                          <a:latin typeface="Courier New" panose="02070309020205020404" pitchFamily="49" charset="0"/>
+                        </a:rPr>
+                        <a:t>-i</a:t>
+                      </a:r>
+                      <a:endParaRPr lang="en-IE"/>
+                    </a:p>
+                  </a:txBody>
+                  <a:tcPr anchor="ctr">
+                    <a:lnL>
+                      <a:noFill/>
+                    </a:lnL>
+                    <a:lnR>
+                      <a:noFill/>
+                    </a:lnR>
+                    <a:lnT>
+                      <a:noFill/>
+                    </a:lnT>
+                    <a:lnB>
+                      <a:noFill/>
+                    </a:lnB>
+                    <a:noFill/>
+                  </a:tcPr>
+                </a:tc>
+                <a:extLst>
+                  <a:ext uri="{0D108BD9-81ED-4DB2-BD59-A6C34878D82A}">
+                    <a16:rowId xmlns:a16="http://schemas.microsoft.com/office/drawing/2014/main" val="702484789"/>
+                  </a:ext>
+                </a:extLst>
+              </a:tr>
+              <a:tr h="0">
+                <a:tc>
+                  <a:txBody>
+                    <a:bodyPr/>
+                    <a:lstStyle/>
+                    <a:p>
+                      <a:pPr algn="l">
+                        <a:buNone/>
+                      </a:pPr>
+                      <a:r>
+                        <a:rPr lang="en-IE">
+                          <a:latin typeface="Courier New" panose="02070309020205020404" pitchFamily="49" charset="0"/>
+                        </a:rPr>
+                        <a:t>-v</a:t>
+                      </a:r>
+                      <a:endParaRPr lang="en-IE"/>
+                    </a:p>
+                  </a:txBody>
+                  <a:tcPr anchor="ctr">
+                    <a:lnL>
+                      <a:noFill/>
+                    </a:lnL>
+                    <a:lnR>
+                      <a:noFill/>
+                    </a:lnR>
+                    <a:lnT>
+                      <a:noFill/>
+                    </a:lnT>
+                    <a:lnB>
+                      <a:noFill/>
+                    </a:lnB>
+                    <a:noFill/>
+                  </a:tcPr>
+                </a:tc>
+                <a:tc>
+                  <a:txBody>
+                    <a:bodyPr/>
+                    <a:lstStyle/>
+                    <a:p>
+                      <a:pPr algn="l">
+                        <a:buNone/>
+                      </a:pPr>
+                      <a:r>
+                        <a:rPr lang="en-IE"/>
+                        <a:t>Verbose output (debug)</a:t>
+                      </a:r>
+                    </a:p>
+                  </a:txBody>
+                  <a:tcPr anchor="ctr">
+                    <a:lnL>
+                      <a:noFill/>
+                    </a:lnL>
+                    <a:lnR>
+                      <a:noFill/>
+                    </a:lnR>
+                    <a:lnT>
+                      <a:noFill/>
+                    </a:lnT>
+                    <a:lnB>
+                      <a:noFill/>
+                    </a:lnB>
+                    <a:noFill/>
+                  </a:tcPr>
+                </a:tc>
+                <a:tc>
+                  <a:txBody>
+                    <a:bodyPr/>
+                    <a:lstStyle/>
+                    <a:p>
+                      <a:pPr algn="l">
+                        <a:buNone/>
+                      </a:pPr>
+                      <a:r>
+                        <a:rPr lang="en-IE" dirty="0">
+                          <a:latin typeface="Courier New" panose="02070309020205020404" pitchFamily="49" charset="0"/>
+                        </a:rPr>
+                        <a:t>-v</a:t>
+                      </a:r>
+                      <a:endParaRPr lang="en-IE" dirty="0"/>
+                    </a:p>
+                  </a:txBody>
+                  <a:tcPr anchor="ctr">
+                    <a:lnL>
+                      <a:noFill/>
+                    </a:lnL>
+                    <a:lnR>
+                      <a:noFill/>
+                    </a:lnR>
+                    <a:lnT>
+                      <a:noFill/>
+                    </a:lnT>
+                    <a:lnB>
+                      <a:noFill/>
+                    </a:lnB>
+                    <a:noFill/>
+                  </a:tcPr>
+                </a:tc>
+                <a:extLst>
+                  <a:ext uri="{0D108BD9-81ED-4DB2-BD59-A6C34878D82A}">
+                    <a16:rowId xmlns:a16="http://schemas.microsoft.com/office/drawing/2014/main" val="1280565316"/>
+                  </a:ext>
+                </a:extLst>
+              </a:tr>
+              <a:tr h="0">
+                <a:tc>
+                  <a:txBody>
+                    <a:bodyPr/>
+                    <a:lstStyle/>
+                    <a:p>
+                      <a:pPr algn="l">
+                        <a:buNone/>
+                      </a:pPr>
+                      <a:r>
+                        <a:rPr lang="en-IE" dirty="0">
+                          <a:latin typeface="Courier New" panose="02070309020205020404" pitchFamily="49" charset="0"/>
+                        </a:rPr>
+                        <a:t>-o</a:t>
+                      </a:r>
+                      <a:endParaRPr lang="en-IE" dirty="0"/>
+                    </a:p>
+                  </a:txBody>
+                  <a:tcPr anchor="ctr">
+                    <a:lnL>
+                      <a:noFill/>
+                    </a:lnL>
+                    <a:lnR>
+                      <a:noFill/>
+                    </a:lnR>
+                    <a:lnT>
+                      <a:noFill/>
+                    </a:lnT>
+                    <a:lnB>
+                      <a:noFill/>
+                    </a:lnB>
+                    <a:noFill/>
+                  </a:tcPr>
+                </a:tc>
+                <a:tc>
+                  <a:txBody>
+                    <a:bodyPr/>
+                    <a:lstStyle/>
+                    <a:p>
+                      <a:pPr algn="l">
+                        <a:buNone/>
+                      </a:pPr>
+                      <a:r>
+                        <a:rPr lang="en-IE"/>
+                        <a:t>Save output to file</a:t>
+                      </a:r>
+                    </a:p>
+                  </a:txBody>
+                  <a:tcPr anchor="ctr">
+                    <a:lnL>
+                      <a:noFill/>
+                    </a:lnL>
+                    <a:lnR>
+                      <a:noFill/>
+                    </a:lnR>
+                    <a:lnT>
+                      <a:noFill/>
+                    </a:lnT>
+                    <a:lnB>
+                      <a:noFill/>
+                    </a:lnB>
+                    <a:noFill/>
+                  </a:tcPr>
+                </a:tc>
+                <a:tc>
+                  <a:txBody>
+                    <a:bodyPr/>
+                    <a:lstStyle/>
+                    <a:p>
+                      <a:pPr algn="l">
+                        <a:buNone/>
+                      </a:pPr>
+                      <a:r>
+                        <a:rPr lang="en-IE" dirty="0">
+                          <a:latin typeface="Courier New" panose="02070309020205020404" pitchFamily="49" charset="0"/>
+                        </a:rPr>
+                        <a:t>-o </a:t>
+                      </a:r>
+                      <a:r>
+                        <a:rPr lang="en-IE" dirty="0" err="1">
+                          <a:latin typeface="Courier New" panose="02070309020205020404" pitchFamily="49" charset="0"/>
+                        </a:rPr>
+                        <a:t>result.json</a:t>
+                      </a:r>
+                      <a:endParaRPr lang="en-IE" dirty="0"/>
+                    </a:p>
+                  </a:txBody>
+                  <a:tcPr anchor="ctr">
+                    <a:lnL>
+                      <a:noFill/>
+                    </a:lnL>
+                    <a:lnR>
+                      <a:noFill/>
+                    </a:lnR>
+                    <a:lnT>
+                      <a:noFill/>
+                    </a:lnT>
+                    <a:lnB>
+                      <a:noFill/>
+                    </a:lnB>
+                    <a:noFill/>
+                  </a:tcPr>
+                </a:tc>
+                <a:extLst>
+                  <a:ext uri="{0D108BD9-81ED-4DB2-BD59-A6C34878D82A}">
+                    <a16:rowId xmlns:a16="http://schemas.microsoft.com/office/drawing/2014/main" val="3253094629"/>
+                  </a:ext>
+                </a:extLst>
+              </a:tr>
+            </a:tbl>
+          </a:graphicData>
+        </a:graphic>
+      </p:graphicFrame>
+      <p:sp>
+        <p:nvSpPr>
+          <p:cNvPr id="5" name="TextBox 4">
+            <a:extLst>
+              <a:ext uri="{FF2B5EF4-FFF2-40B4-BE49-F238E27FC236}">
+                <a16:creationId xmlns:a16="http://schemas.microsoft.com/office/drawing/2014/main" id="{768D80F1-9EDB-2C56-6B50-198E6F8E87E4}"/>
+              </a:ext>
+            </a:extLst>
+          </p:cNvPr>
+          <p:cNvSpPr txBox="1"/>
+          <p:nvPr/>
+        </p:nvSpPr>
+        <p:spPr>
+          <a:xfrm>
+            <a:off x="749147" y="4990641"/>
+            <a:ext cx="11171104" cy="1107996"/>
+          </a:xfrm>
+          <a:prstGeom prst="rect">
+            <a:avLst/>
+          </a:prstGeom>
+          <a:noFill/>
+        </p:spPr>
+        <p:txBody>
+          <a:bodyPr wrap="square" rtlCol="0">
+            <a:spAutoFit/>
+          </a:bodyPr>
+          <a:lstStyle/>
+          <a:p>
+            <a:r>
+              <a:rPr lang="en-IE" dirty="0"/>
+              <a:t>Example:</a:t>
+            </a:r>
+          </a:p>
+          <a:p>
+            <a:r>
+              <a:rPr lang="en-GB" sz="2400" dirty="0">
+                <a:latin typeface="Courier New" panose="02070309020205020404" pitchFamily="49" charset="0"/>
+                <a:cs typeface="Courier New" panose="02070309020205020404" pitchFamily="49" charset="0"/>
+              </a:rPr>
+              <a:t>curl -X PUT https://api.example.com/light/1  </a:t>
+            </a:r>
+            <a:br>
+              <a:rPr lang="en-GB" sz="2400" dirty="0">
+                <a:latin typeface="Courier New" panose="02070309020205020404" pitchFamily="49" charset="0"/>
+                <a:cs typeface="Courier New" panose="02070309020205020404" pitchFamily="49" charset="0"/>
+              </a:rPr>
+            </a:br>
+            <a:r>
+              <a:rPr lang="en-GB" sz="2400" dirty="0">
+                <a:latin typeface="Courier New" panose="02070309020205020404" pitchFamily="49" charset="0"/>
+                <a:cs typeface="Courier New" panose="02070309020205020404" pitchFamily="49" charset="0"/>
+              </a:rPr>
+              <a:t>-H "Content-Type: application/</a:t>
+            </a:r>
+            <a:r>
+              <a:rPr lang="en-GB" sz="2400" dirty="0" err="1">
+                <a:latin typeface="Courier New" panose="02070309020205020404" pitchFamily="49" charset="0"/>
+                <a:cs typeface="Courier New" panose="02070309020205020404" pitchFamily="49" charset="0"/>
+              </a:rPr>
+              <a:t>json</a:t>
+            </a:r>
+            <a:r>
+              <a:rPr lang="en-GB" sz="2400" dirty="0">
+                <a:latin typeface="Courier New" panose="02070309020205020404" pitchFamily="49" charset="0"/>
+                <a:cs typeface="Courier New" panose="02070309020205020404" pitchFamily="49" charset="0"/>
+              </a:rPr>
+              <a:t>"   -d '{"</a:t>
+            </a:r>
+            <a:r>
+              <a:rPr lang="en-GB" sz="2400" dirty="0" err="1">
+                <a:latin typeface="Courier New" panose="02070309020205020404" pitchFamily="49" charset="0"/>
+                <a:cs typeface="Courier New" panose="02070309020205020404" pitchFamily="49" charset="0"/>
+              </a:rPr>
+              <a:t>state":"off</a:t>
+            </a:r>
+            <a:r>
+              <a:rPr lang="en-GB" sz="2400" dirty="0">
+                <a:latin typeface="Courier New" panose="02070309020205020404" pitchFamily="49" charset="0"/>
+                <a:cs typeface="Courier New" panose="02070309020205020404" pitchFamily="49" charset="0"/>
+              </a:rPr>
+              <a:t>"}'</a:t>
+            </a:r>
+            <a:endParaRPr lang="en-IE" sz="2400" dirty="0">
+              <a:latin typeface="Courier New" panose="02070309020205020404" pitchFamily="49" charset="0"/>
+              <a:cs typeface="Courier New" panose="02070309020205020404" pitchFamily="49" charset="0"/>
+            </a:endParaRPr>
+          </a:p>
+        </p:txBody>
+      </p:sp>
+    </p:spTree>
+    <p:extLst>
+      <p:ext uri="{BB962C8B-B14F-4D97-AF65-F5344CB8AC3E}">
+        <p14:creationId xmlns:p14="http://schemas.microsoft.com/office/powerpoint/2010/main" val="1206908461"/>
+      </p:ext>
+    </p:extLst>
+  </p:cSld>
+  <p:clrMapOvr>
+    <a:masterClrMapping/>
+  </p:clrMapOvr>
+</p:sld>
+</file>
+
+<file path=ppt/slides/slide18.xml><?xml version="1.0" encoding="utf-8"?>
 <p:sld xmlns:a="http://schemas.openxmlformats.org/drawingml/2006/main" xmlns:r="http://schemas.openxmlformats.org/officeDocument/2006/relationships" xmlns:p="http://schemas.openxmlformats.org/presentationml/2006/main">
   <p:cSld>
     <p:spTree>
@@ -9510,7 +10625,7 @@
               <a:rPr lang="en-US" sz="1400" dirty="0">
                 <a:cs typeface="Calibri"/>
               </a:rPr>
-              <a:t>Post </a:t>
+              <a:t>PUT </a:t>
             </a:r>
             <a:r>
               <a:rPr lang="en-IE" sz="1400" b="0" i="0" dirty="0">
@@ -9546,7 +10661,7 @@
               <a:rPr lang="en-US" sz="1400" dirty="0">
                 <a:cs typeface="Calibri"/>
               </a:rPr>
-              <a:t> to the resource at /light</a:t>
+              <a:t> to the resource at /device/123/power</a:t>
             </a:r>
             <a:endParaRPr lang="en-US" sz="1050" dirty="0">
               <a:cs typeface="Calibri"/>
@@ -9649,7 +10764,7 @@
 </p:sld>
 </file>
 
-<file path=ppt/slides/slide17.xml><?xml version="1.0" encoding="utf-8"?>
+<file path=ppt/slides/slide19.xml><?xml version="1.0" encoding="utf-8"?>
 <p:sld xmlns:a="http://schemas.openxmlformats.org/drawingml/2006/main" xmlns:r="http://schemas.openxmlformats.org/officeDocument/2006/relationships" xmlns:p="http://schemas.openxmlformats.org/presentationml/2006/main">
   <p:cSld>
     <p:spTree>
@@ -10142,13 +11257,13 @@
             </a:r>
             <a:r>
               <a:rPr lang="en-US" sz="1200" dirty="0"/>
-              <a:t>POST</a:t>
+              <a:t>PUT</a:t>
             </a:r>
             <a:r>
               <a:rPr lang="en-US" sz="1200" dirty="0">
                 <a:cs typeface="Calibri"/>
               </a:rPr>
-              <a:t> /light</a:t>
+              <a:t> /device/123/power</a:t>
             </a:r>
             <a:br>
               <a:rPr lang="en-US" sz="1200" dirty="0">
@@ -10428,7 +11543,7 @@
               <a:rPr lang="en-US" sz="1400" b="1" dirty="0">
                 <a:cs typeface="Calibri"/>
               </a:rPr>
-              <a:t>/light</a:t>
+              <a:t>/device/123</a:t>
             </a:r>
             <a:r>
               <a:rPr lang="en-US" sz="1400" dirty="0">
@@ -10446,943 +11561,6 @@
     <p:extLst>
       <p:ext uri="{BB962C8B-B14F-4D97-AF65-F5344CB8AC3E}">
         <p14:creationId xmlns:p14="http://schemas.microsoft.com/office/powerpoint/2010/main" val="1977969520"/>
-      </p:ext>
-    </p:extLst>
-  </p:cSld>
-  <p:clrMapOvr>
-    <a:masterClrMapping/>
-  </p:clrMapOvr>
-</p:sld>
-</file>
-
-<file path=ppt/slides/slide18.xml><?xml version="1.0" encoding="utf-8"?>
-<p:sld xmlns:a="http://schemas.openxmlformats.org/drawingml/2006/main" xmlns:r="http://schemas.openxmlformats.org/officeDocument/2006/relationships" xmlns:p="http://schemas.openxmlformats.org/presentationml/2006/main">
-  <p:cSld>
-    <p:spTree>
-      <p:nvGrpSpPr>
-        <p:cNvPr id="1" name=""/>
-        <p:cNvGrpSpPr/>
-        <p:nvPr/>
-      </p:nvGrpSpPr>
-      <p:grpSpPr>
-        <a:xfrm>
-          <a:off x="0" y="0"/>
-          <a:ext cx="0" cy="0"/>
-          <a:chOff x="0" y="0"/>
-          <a:chExt cx="0" cy="0"/>
-        </a:xfrm>
-      </p:grpSpPr>
-      <p:pic>
-        <p:nvPicPr>
-          <p:cNvPr id="2" name="Picture 1" descr="A close up of a device&#10;&#10;Description generated with very high confidence">
-            <a:extLst>
-              <a:ext uri="{FF2B5EF4-FFF2-40B4-BE49-F238E27FC236}">
-                <a16:creationId xmlns:a16="http://schemas.microsoft.com/office/drawing/2014/main" id="{FDC7C3FD-30C2-4FE7-8B0E-783BB8308346}"/>
-              </a:ext>
-            </a:extLst>
-          </p:cNvPr>
-          <p:cNvPicPr>
-            <a:picLocks noChangeAspect="1"/>
-          </p:cNvPicPr>
-          <p:nvPr/>
-        </p:nvPicPr>
-        <p:blipFill>
-          <a:blip r:embed="rId2"/>
-          <a:stretch>
-            <a:fillRect/>
-          </a:stretch>
-        </p:blipFill>
-        <p:spPr>
-          <a:xfrm>
-            <a:off x="6070311" y="3245188"/>
-            <a:ext cx="1353901" cy="1390640"/>
-          </a:xfrm>
-          <a:prstGeom prst="rect">
-            <a:avLst/>
-          </a:prstGeom>
-        </p:spPr>
-      </p:pic>
-      <p:pic>
-        <p:nvPicPr>
-          <p:cNvPr id="3" name="Picture 2" descr="A close up of a logo&#10;&#10;Description generated with very high confidence">
-            <a:extLst>
-              <a:ext uri="{FF2B5EF4-FFF2-40B4-BE49-F238E27FC236}">
-                <a16:creationId xmlns:a16="http://schemas.microsoft.com/office/drawing/2014/main" id="{51015C5D-FE6B-4B41-BB71-196E38A81C0B}"/>
-              </a:ext>
-            </a:extLst>
-          </p:cNvPr>
-          <p:cNvPicPr>
-            <a:picLocks noChangeAspect="1"/>
-          </p:cNvPicPr>
-          <p:nvPr/>
-        </p:nvPicPr>
-        <p:blipFill>
-          <a:blip r:embed="rId3"/>
-          <a:stretch>
-            <a:fillRect/>
-          </a:stretch>
-        </p:blipFill>
-        <p:spPr>
-          <a:xfrm>
-            <a:off x="2723625" y="3370087"/>
-            <a:ext cx="770618" cy="1123042"/>
-          </a:xfrm>
-          <a:prstGeom prst="rect">
-            <a:avLst/>
-          </a:prstGeom>
-        </p:spPr>
-      </p:pic>
-      <p:sp>
-        <p:nvSpPr>
-          <p:cNvPr id="7" name="Arrow: Left 6">
-            <a:extLst>
-              <a:ext uri="{FF2B5EF4-FFF2-40B4-BE49-F238E27FC236}">
-                <a16:creationId xmlns:a16="http://schemas.microsoft.com/office/drawing/2014/main" id="{EAF6439E-6043-4937-B03C-CC139A02990B}"/>
-              </a:ext>
-            </a:extLst>
-          </p:cNvPr>
-          <p:cNvSpPr/>
-          <p:nvPr/>
-        </p:nvSpPr>
-        <p:spPr>
-          <a:xfrm>
-            <a:off x="3611082" y="3721897"/>
-            <a:ext cx="2520550" cy="212490"/>
-          </a:xfrm>
-          <a:prstGeom prst="leftArrow">
-            <a:avLst/>
-          </a:prstGeom>
-        </p:spPr>
-        <p:style>
-          <a:lnRef idx="2">
-            <a:schemeClr val="accent1">
-              <a:shade val="50000"/>
-            </a:schemeClr>
-          </a:lnRef>
-          <a:fillRef idx="1">
-            <a:schemeClr val="accent1"/>
-          </a:fillRef>
-          <a:effectRef idx="0">
-            <a:schemeClr val="accent1"/>
-          </a:effectRef>
-          <a:fontRef idx="minor">
-            <a:schemeClr val="lt1"/>
-          </a:fontRef>
-        </p:style>
-        <p:txBody>
-          <a:bodyPr rot="0" spcFirstLastPara="0" vert="horz" wrap="square" lIns="91440" tIns="45720" rIns="91440" bIns="45720" numCol="1" spcCol="0" rtlCol="0" fromWordArt="0" anchor="ctr" anchorCtr="0" forceAA="0" compatLnSpc="1">
-            <a:prstTxWarp prst="textNoShape">
-              <a:avLst/>
-            </a:prstTxWarp>
-            <a:noAutofit/>
-          </a:bodyPr>
-          <a:lstStyle>
-            <a:defPPr>
-              <a:defRPr lang="en-US"/>
-            </a:defPPr>
-            <a:lvl1pPr marL="0" algn="l" defTabSz="914400" rtl="0" eaLnBrk="1" latinLnBrk="0" hangingPunct="1">
-              <a:defRPr sz="1800" kern="1200">
-                <a:solidFill>
-                  <a:schemeClr val="lt1"/>
-                </a:solidFill>
-                <a:latin typeface="+mn-lt"/>
-                <a:ea typeface="+mn-ea"/>
-                <a:cs typeface="+mn-cs"/>
-              </a:defRPr>
-            </a:lvl1pPr>
-            <a:lvl2pPr marL="457200" algn="l" defTabSz="914400" rtl="0" eaLnBrk="1" latinLnBrk="0" hangingPunct="1">
-              <a:defRPr sz="1800" kern="1200">
-                <a:solidFill>
-                  <a:schemeClr val="lt1"/>
-                </a:solidFill>
-                <a:latin typeface="+mn-lt"/>
-                <a:ea typeface="+mn-ea"/>
-                <a:cs typeface="+mn-cs"/>
-              </a:defRPr>
-            </a:lvl2pPr>
-            <a:lvl3pPr marL="914400" algn="l" defTabSz="914400" rtl="0" eaLnBrk="1" latinLnBrk="0" hangingPunct="1">
-              <a:defRPr sz="1800" kern="1200">
-                <a:solidFill>
-                  <a:schemeClr val="lt1"/>
-                </a:solidFill>
-                <a:latin typeface="+mn-lt"/>
-                <a:ea typeface="+mn-ea"/>
-                <a:cs typeface="+mn-cs"/>
-              </a:defRPr>
-            </a:lvl3pPr>
-            <a:lvl4pPr marL="1371600" algn="l" defTabSz="914400" rtl="0" eaLnBrk="1" latinLnBrk="0" hangingPunct="1">
-              <a:defRPr sz="1800" kern="1200">
-                <a:solidFill>
-                  <a:schemeClr val="lt1"/>
-                </a:solidFill>
-                <a:latin typeface="+mn-lt"/>
-                <a:ea typeface="+mn-ea"/>
-                <a:cs typeface="+mn-cs"/>
-              </a:defRPr>
-            </a:lvl4pPr>
-            <a:lvl5pPr marL="1828800" algn="l" defTabSz="914400" rtl="0" eaLnBrk="1" latinLnBrk="0" hangingPunct="1">
-              <a:defRPr sz="1800" kern="1200">
-                <a:solidFill>
-                  <a:schemeClr val="lt1"/>
-                </a:solidFill>
-                <a:latin typeface="+mn-lt"/>
-                <a:ea typeface="+mn-ea"/>
-                <a:cs typeface="+mn-cs"/>
-              </a:defRPr>
-            </a:lvl5pPr>
-            <a:lvl6pPr marL="2286000" algn="l" defTabSz="914400" rtl="0" eaLnBrk="1" latinLnBrk="0" hangingPunct="1">
-              <a:defRPr sz="1800" kern="1200">
-                <a:solidFill>
-                  <a:schemeClr val="lt1"/>
-                </a:solidFill>
-                <a:latin typeface="+mn-lt"/>
-                <a:ea typeface="+mn-ea"/>
-                <a:cs typeface="+mn-cs"/>
-              </a:defRPr>
-            </a:lvl6pPr>
-            <a:lvl7pPr marL="2743200" algn="l" defTabSz="914400" rtl="0" eaLnBrk="1" latinLnBrk="0" hangingPunct="1">
-              <a:defRPr sz="1800" kern="1200">
-                <a:solidFill>
-                  <a:schemeClr val="lt1"/>
-                </a:solidFill>
-                <a:latin typeface="+mn-lt"/>
-                <a:ea typeface="+mn-ea"/>
-                <a:cs typeface="+mn-cs"/>
-              </a:defRPr>
-            </a:lvl7pPr>
-            <a:lvl8pPr marL="3200400" algn="l" defTabSz="914400" rtl="0" eaLnBrk="1" latinLnBrk="0" hangingPunct="1">
-              <a:defRPr sz="1800" kern="1200">
-                <a:solidFill>
-                  <a:schemeClr val="lt1"/>
-                </a:solidFill>
-                <a:latin typeface="+mn-lt"/>
-                <a:ea typeface="+mn-ea"/>
-                <a:cs typeface="+mn-cs"/>
-              </a:defRPr>
-            </a:lvl8pPr>
-            <a:lvl9pPr marL="3657600" algn="l" defTabSz="914400" rtl="0" eaLnBrk="1" latinLnBrk="0" hangingPunct="1">
-              <a:defRPr sz="1800" kern="1200">
-                <a:solidFill>
-                  <a:schemeClr val="lt1"/>
-                </a:solidFill>
-                <a:latin typeface="+mn-lt"/>
-                <a:ea typeface="+mn-ea"/>
-                <a:cs typeface="+mn-cs"/>
-              </a:defRPr>
-            </a:lvl9pPr>
-          </a:lstStyle>
-          <a:p>
-            <a:pPr algn="ctr"/>
-            <a:endParaRPr lang="en-US"/>
-          </a:p>
-        </p:txBody>
-      </p:sp>
-      <p:sp>
-        <p:nvSpPr>
-          <p:cNvPr id="8" name="TextBox 7">
-            <a:extLst>
-              <a:ext uri="{FF2B5EF4-FFF2-40B4-BE49-F238E27FC236}">
-                <a16:creationId xmlns:a16="http://schemas.microsoft.com/office/drawing/2014/main" id="{D54619FB-A9E0-460B-ACD4-9F5DFFF49AE2}"/>
-              </a:ext>
-            </a:extLst>
-          </p:cNvPr>
-          <p:cNvSpPr txBox="1"/>
-          <p:nvPr/>
-        </p:nvSpPr>
-        <p:spPr>
-          <a:xfrm>
-            <a:off x="3454399" y="3427184"/>
-            <a:ext cx="2743200" cy="369332"/>
-          </a:xfrm>
-          <a:prstGeom prst="rect">
-            <a:avLst/>
-          </a:prstGeom>
-        </p:spPr>
-        <p:txBody>
-          <a:bodyPr rot="0" spcFirstLastPara="0" vert="horz" wrap="square" lIns="91440" tIns="45720" rIns="91440" bIns="45720" numCol="1" spcCol="0" rtlCol="0" fromWordArt="0" anchor="t" anchorCtr="0" forceAA="0" compatLnSpc="1">
-            <a:prstTxWarp prst="textNoShape">
-              <a:avLst/>
-            </a:prstTxWarp>
-            <a:spAutoFit/>
-          </a:bodyPr>
-          <a:lstStyle>
-            <a:defPPr>
-              <a:defRPr lang="en-US"/>
-            </a:defPPr>
-            <a:lvl1pPr marL="0" algn="l" defTabSz="914400" rtl="0" eaLnBrk="1" latinLnBrk="0" hangingPunct="1">
-              <a:defRPr sz="1800" kern="1200">
-                <a:solidFill>
-                  <a:schemeClr val="tx1"/>
-                </a:solidFill>
-                <a:latin typeface="+mn-lt"/>
-                <a:ea typeface="+mn-ea"/>
-                <a:cs typeface="+mn-cs"/>
-              </a:defRPr>
-            </a:lvl1pPr>
-            <a:lvl2pPr marL="457200" algn="l" defTabSz="914400" rtl="0" eaLnBrk="1" latinLnBrk="0" hangingPunct="1">
-              <a:defRPr sz="1800" kern="1200">
-                <a:solidFill>
-                  <a:schemeClr val="tx1"/>
-                </a:solidFill>
-                <a:latin typeface="+mn-lt"/>
-                <a:ea typeface="+mn-ea"/>
-                <a:cs typeface="+mn-cs"/>
-              </a:defRPr>
-            </a:lvl2pPr>
-            <a:lvl3pPr marL="914400" algn="l" defTabSz="914400" rtl="0" eaLnBrk="1" latinLnBrk="0" hangingPunct="1">
-              <a:defRPr sz="1800" kern="1200">
-                <a:solidFill>
-                  <a:schemeClr val="tx1"/>
-                </a:solidFill>
-                <a:latin typeface="+mn-lt"/>
-                <a:ea typeface="+mn-ea"/>
-                <a:cs typeface="+mn-cs"/>
-              </a:defRPr>
-            </a:lvl3pPr>
-            <a:lvl4pPr marL="1371600" algn="l" defTabSz="914400" rtl="0" eaLnBrk="1" latinLnBrk="0" hangingPunct="1">
-              <a:defRPr sz="1800" kern="1200">
-                <a:solidFill>
-                  <a:schemeClr val="tx1"/>
-                </a:solidFill>
-                <a:latin typeface="+mn-lt"/>
-                <a:ea typeface="+mn-ea"/>
-                <a:cs typeface="+mn-cs"/>
-              </a:defRPr>
-            </a:lvl4pPr>
-            <a:lvl5pPr marL="1828800" algn="l" defTabSz="914400" rtl="0" eaLnBrk="1" latinLnBrk="0" hangingPunct="1">
-              <a:defRPr sz="1800" kern="1200">
-                <a:solidFill>
-                  <a:schemeClr val="tx1"/>
-                </a:solidFill>
-                <a:latin typeface="+mn-lt"/>
-                <a:ea typeface="+mn-ea"/>
-                <a:cs typeface="+mn-cs"/>
-              </a:defRPr>
-            </a:lvl5pPr>
-            <a:lvl6pPr marL="2286000" algn="l" defTabSz="914400" rtl="0" eaLnBrk="1" latinLnBrk="0" hangingPunct="1">
-              <a:defRPr sz="1800" kern="1200">
-                <a:solidFill>
-                  <a:schemeClr val="tx1"/>
-                </a:solidFill>
-                <a:latin typeface="+mn-lt"/>
-                <a:ea typeface="+mn-ea"/>
-                <a:cs typeface="+mn-cs"/>
-              </a:defRPr>
-            </a:lvl6pPr>
-            <a:lvl7pPr marL="2743200" algn="l" defTabSz="914400" rtl="0" eaLnBrk="1" latinLnBrk="0" hangingPunct="1">
-              <a:defRPr sz="1800" kern="1200">
-                <a:solidFill>
-                  <a:schemeClr val="tx1"/>
-                </a:solidFill>
-                <a:latin typeface="+mn-lt"/>
-                <a:ea typeface="+mn-ea"/>
-                <a:cs typeface="+mn-cs"/>
-              </a:defRPr>
-            </a:lvl7pPr>
-            <a:lvl8pPr marL="3200400" algn="l" defTabSz="914400" rtl="0" eaLnBrk="1" latinLnBrk="0" hangingPunct="1">
-              <a:defRPr sz="1800" kern="1200">
-                <a:solidFill>
-                  <a:schemeClr val="tx1"/>
-                </a:solidFill>
-                <a:latin typeface="+mn-lt"/>
-                <a:ea typeface="+mn-ea"/>
-                <a:cs typeface="+mn-cs"/>
-              </a:defRPr>
-            </a:lvl8pPr>
-            <a:lvl9pPr marL="3657600" algn="l" defTabSz="914400" rtl="0" eaLnBrk="1" latinLnBrk="0" hangingPunct="1">
-              <a:defRPr sz="1800" kern="1200">
-                <a:solidFill>
-                  <a:schemeClr val="tx1"/>
-                </a:solidFill>
-                <a:latin typeface="+mn-lt"/>
-                <a:ea typeface="+mn-ea"/>
-                <a:cs typeface="+mn-cs"/>
-              </a:defRPr>
-            </a:lvl9pPr>
-          </a:lstStyle>
-          <a:p>
-            <a:pPr algn="ctr"/>
-            <a:r>
-              <a:rPr lang="en-US" dirty="0"/>
-              <a:t>HTTP Response</a:t>
-            </a:r>
-          </a:p>
-        </p:txBody>
-      </p:sp>
-      <p:sp>
-        <p:nvSpPr>
-          <p:cNvPr id="9" name="TextBox 8">
-            <a:extLst>
-              <a:ext uri="{FF2B5EF4-FFF2-40B4-BE49-F238E27FC236}">
-                <a16:creationId xmlns:a16="http://schemas.microsoft.com/office/drawing/2014/main" id="{AAD1317E-EE50-45D7-B093-C9B2224F790A}"/>
-              </a:ext>
-            </a:extLst>
-          </p:cNvPr>
-          <p:cNvSpPr txBox="1"/>
-          <p:nvPr/>
-        </p:nvSpPr>
-        <p:spPr>
-          <a:xfrm>
-            <a:off x="4034969" y="3944256"/>
-            <a:ext cx="1854199" cy="738664"/>
-          </a:xfrm>
-          <a:prstGeom prst="rect">
-            <a:avLst/>
-          </a:prstGeom>
-          <a:ln>
-            <a:solidFill>
-              <a:schemeClr val="tx1">
-                <a:lumMod val="95000"/>
-                <a:lumOff val="5000"/>
-              </a:schemeClr>
-            </a:solidFill>
-          </a:ln>
-        </p:spPr>
-        <p:txBody>
-          <a:bodyPr rot="0" spcFirstLastPara="0" vert="horz" wrap="square" lIns="91440" tIns="45720" rIns="91440" bIns="45720" numCol="1" spcCol="0" rtlCol="0" fromWordArt="0" anchor="t" anchorCtr="0" forceAA="0" compatLnSpc="1">
-            <a:prstTxWarp prst="textNoShape">
-              <a:avLst/>
-            </a:prstTxWarp>
-            <a:spAutoFit/>
-          </a:bodyPr>
-          <a:lstStyle>
-            <a:defPPr>
-              <a:defRPr lang="en-US"/>
-            </a:defPPr>
-            <a:lvl1pPr marL="0" algn="l" defTabSz="914400" rtl="0" eaLnBrk="1" latinLnBrk="0" hangingPunct="1">
-              <a:defRPr sz="1800" kern="1200">
-                <a:solidFill>
-                  <a:schemeClr val="tx1"/>
-                </a:solidFill>
-                <a:latin typeface="+mn-lt"/>
-                <a:ea typeface="+mn-ea"/>
-                <a:cs typeface="+mn-cs"/>
-              </a:defRPr>
-            </a:lvl1pPr>
-            <a:lvl2pPr marL="457200" algn="l" defTabSz="914400" rtl="0" eaLnBrk="1" latinLnBrk="0" hangingPunct="1">
-              <a:defRPr sz="1800" kern="1200">
-                <a:solidFill>
-                  <a:schemeClr val="tx1"/>
-                </a:solidFill>
-                <a:latin typeface="+mn-lt"/>
-                <a:ea typeface="+mn-ea"/>
-                <a:cs typeface="+mn-cs"/>
-              </a:defRPr>
-            </a:lvl2pPr>
-            <a:lvl3pPr marL="914400" algn="l" defTabSz="914400" rtl="0" eaLnBrk="1" latinLnBrk="0" hangingPunct="1">
-              <a:defRPr sz="1800" kern="1200">
-                <a:solidFill>
-                  <a:schemeClr val="tx1"/>
-                </a:solidFill>
-                <a:latin typeface="+mn-lt"/>
-                <a:ea typeface="+mn-ea"/>
-                <a:cs typeface="+mn-cs"/>
-              </a:defRPr>
-            </a:lvl3pPr>
-            <a:lvl4pPr marL="1371600" algn="l" defTabSz="914400" rtl="0" eaLnBrk="1" latinLnBrk="0" hangingPunct="1">
-              <a:defRPr sz="1800" kern="1200">
-                <a:solidFill>
-                  <a:schemeClr val="tx1"/>
-                </a:solidFill>
-                <a:latin typeface="+mn-lt"/>
-                <a:ea typeface="+mn-ea"/>
-                <a:cs typeface="+mn-cs"/>
-              </a:defRPr>
-            </a:lvl4pPr>
-            <a:lvl5pPr marL="1828800" algn="l" defTabSz="914400" rtl="0" eaLnBrk="1" latinLnBrk="0" hangingPunct="1">
-              <a:defRPr sz="1800" kern="1200">
-                <a:solidFill>
-                  <a:schemeClr val="tx1"/>
-                </a:solidFill>
-                <a:latin typeface="+mn-lt"/>
-                <a:ea typeface="+mn-ea"/>
-                <a:cs typeface="+mn-cs"/>
-              </a:defRPr>
-            </a:lvl5pPr>
-            <a:lvl6pPr marL="2286000" algn="l" defTabSz="914400" rtl="0" eaLnBrk="1" latinLnBrk="0" hangingPunct="1">
-              <a:defRPr sz="1800" kern="1200">
-                <a:solidFill>
-                  <a:schemeClr val="tx1"/>
-                </a:solidFill>
-                <a:latin typeface="+mn-lt"/>
-                <a:ea typeface="+mn-ea"/>
-                <a:cs typeface="+mn-cs"/>
-              </a:defRPr>
-            </a:lvl6pPr>
-            <a:lvl7pPr marL="2743200" algn="l" defTabSz="914400" rtl="0" eaLnBrk="1" latinLnBrk="0" hangingPunct="1">
-              <a:defRPr sz="1800" kern="1200">
-                <a:solidFill>
-                  <a:schemeClr val="tx1"/>
-                </a:solidFill>
-                <a:latin typeface="+mn-lt"/>
-                <a:ea typeface="+mn-ea"/>
-                <a:cs typeface="+mn-cs"/>
-              </a:defRPr>
-            </a:lvl7pPr>
-            <a:lvl8pPr marL="3200400" algn="l" defTabSz="914400" rtl="0" eaLnBrk="1" latinLnBrk="0" hangingPunct="1">
-              <a:defRPr sz="1800" kern="1200">
-                <a:solidFill>
-                  <a:schemeClr val="tx1"/>
-                </a:solidFill>
-                <a:latin typeface="+mn-lt"/>
-                <a:ea typeface="+mn-ea"/>
-                <a:cs typeface="+mn-cs"/>
-              </a:defRPr>
-            </a:lvl8pPr>
-            <a:lvl9pPr marL="3657600" algn="l" defTabSz="914400" rtl="0" eaLnBrk="1" latinLnBrk="0" hangingPunct="1">
-              <a:defRPr sz="1800" kern="1200">
-                <a:solidFill>
-                  <a:schemeClr val="tx1"/>
-                </a:solidFill>
-                <a:latin typeface="+mn-lt"/>
-                <a:ea typeface="+mn-ea"/>
-                <a:cs typeface="+mn-cs"/>
-              </a:defRPr>
-            </a:lvl9pPr>
-          </a:lstStyle>
-          <a:p>
-            <a:pPr algn="ctr"/>
-            <a:r>
-              <a:rPr lang="en-US" sz="1400" dirty="0">
-                <a:cs typeface="Calibri"/>
-              </a:rPr>
-              <a:t>200 OK</a:t>
-            </a:r>
-          </a:p>
-          <a:p>
-            <a:pPr algn="ctr"/>
-            <a:r>
-              <a:rPr lang="en-US" sz="1400" dirty="0"/>
-              <a:t>{"</a:t>
-            </a:r>
-            <a:r>
-              <a:rPr lang="en-US" sz="1400" dirty="0" err="1"/>
-              <a:t>status":"on</a:t>
-            </a:r>
-            <a:r>
-              <a:rPr lang="en-US" sz="1400" dirty="0"/>
-              <a:t>", "</a:t>
-            </a:r>
-            <a:r>
-              <a:rPr lang="en-US" sz="1400" dirty="0" err="1"/>
-              <a:t>colour</a:t>
-            </a:r>
-            <a:r>
-              <a:rPr lang="en-US" sz="1400" dirty="0"/>
-              <a:t>":"white"}</a:t>
-            </a:r>
-            <a:endParaRPr lang="en-US" sz="1400" dirty="0">
-              <a:cs typeface="Calibri"/>
-            </a:endParaRPr>
-          </a:p>
-        </p:txBody>
-      </p:sp>
-      <p:sp>
-        <p:nvSpPr>
-          <p:cNvPr id="10" name="Speech Bubble: Rectangle with Corners Rounded 9">
-            <a:extLst>
-              <a:ext uri="{FF2B5EF4-FFF2-40B4-BE49-F238E27FC236}">
-                <a16:creationId xmlns:a16="http://schemas.microsoft.com/office/drawing/2014/main" id="{C94A3CFF-9B7C-4141-91A1-D61B8E109DB7}"/>
-              </a:ext>
-            </a:extLst>
-          </p:cNvPr>
-          <p:cNvSpPr/>
-          <p:nvPr/>
-        </p:nvSpPr>
-        <p:spPr>
-          <a:xfrm>
-            <a:off x="2463800" y="2669103"/>
-            <a:ext cx="1422399" cy="576363"/>
-          </a:xfrm>
-          <a:prstGeom prst="wedgeRoundRectCallout">
-            <a:avLst/>
-          </a:prstGeom>
-        </p:spPr>
-        <p:style>
-          <a:lnRef idx="2">
-            <a:schemeClr val="accent1">
-              <a:shade val="50000"/>
-            </a:schemeClr>
-          </a:lnRef>
-          <a:fillRef idx="1">
-            <a:schemeClr val="accent1"/>
-          </a:fillRef>
-          <a:effectRef idx="0">
-            <a:schemeClr val="accent1"/>
-          </a:effectRef>
-          <a:fontRef idx="minor">
-            <a:schemeClr val="lt1"/>
-          </a:fontRef>
-        </p:style>
-        <p:txBody>
-          <a:bodyPr rot="0" spcFirstLastPara="0" vert="horz" wrap="square" lIns="91440" tIns="45720" rIns="91440" bIns="45720" numCol="1" spcCol="0" rtlCol="0" fromWordArt="0" anchor="ctr" anchorCtr="0" forceAA="0" compatLnSpc="1">
-            <a:prstTxWarp prst="textNoShape">
-              <a:avLst/>
-            </a:prstTxWarp>
-            <a:noAutofit/>
-          </a:bodyPr>
-          <a:lstStyle>
-            <a:defPPr>
-              <a:defRPr lang="en-US"/>
-            </a:defPPr>
-            <a:lvl1pPr marL="0" algn="l" defTabSz="914400" rtl="0" eaLnBrk="1" latinLnBrk="0" hangingPunct="1">
-              <a:defRPr sz="1800" kern="1200">
-                <a:solidFill>
-                  <a:schemeClr val="lt1"/>
-                </a:solidFill>
-                <a:latin typeface="+mn-lt"/>
-                <a:ea typeface="+mn-ea"/>
-                <a:cs typeface="+mn-cs"/>
-              </a:defRPr>
-            </a:lvl1pPr>
-            <a:lvl2pPr marL="457200" algn="l" defTabSz="914400" rtl="0" eaLnBrk="1" latinLnBrk="0" hangingPunct="1">
-              <a:defRPr sz="1800" kern="1200">
-                <a:solidFill>
-                  <a:schemeClr val="lt1"/>
-                </a:solidFill>
-                <a:latin typeface="+mn-lt"/>
-                <a:ea typeface="+mn-ea"/>
-                <a:cs typeface="+mn-cs"/>
-              </a:defRPr>
-            </a:lvl2pPr>
-            <a:lvl3pPr marL="914400" algn="l" defTabSz="914400" rtl="0" eaLnBrk="1" latinLnBrk="0" hangingPunct="1">
-              <a:defRPr sz="1800" kern="1200">
-                <a:solidFill>
-                  <a:schemeClr val="lt1"/>
-                </a:solidFill>
-                <a:latin typeface="+mn-lt"/>
-                <a:ea typeface="+mn-ea"/>
-                <a:cs typeface="+mn-cs"/>
-              </a:defRPr>
-            </a:lvl3pPr>
-            <a:lvl4pPr marL="1371600" algn="l" defTabSz="914400" rtl="0" eaLnBrk="1" latinLnBrk="0" hangingPunct="1">
-              <a:defRPr sz="1800" kern="1200">
-                <a:solidFill>
-                  <a:schemeClr val="lt1"/>
-                </a:solidFill>
-                <a:latin typeface="+mn-lt"/>
-                <a:ea typeface="+mn-ea"/>
-                <a:cs typeface="+mn-cs"/>
-              </a:defRPr>
-            </a:lvl4pPr>
-            <a:lvl5pPr marL="1828800" algn="l" defTabSz="914400" rtl="0" eaLnBrk="1" latinLnBrk="0" hangingPunct="1">
-              <a:defRPr sz="1800" kern="1200">
-                <a:solidFill>
-                  <a:schemeClr val="lt1"/>
-                </a:solidFill>
-                <a:latin typeface="+mn-lt"/>
-                <a:ea typeface="+mn-ea"/>
-                <a:cs typeface="+mn-cs"/>
-              </a:defRPr>
-            </a:lvl5pPr>
-            <a:lvl6pPr marL="2286000" algn="l" defTabSz="914400" rtl="0" eaLnBrk="1" latinLnBrk="0" hangingPunct="1">
-              <a:defRPr sz="1800" kern="1200">
-                <a:solidFill>
-                  <a:schemeClr val="lt1"/>
-                </a:solidFill>
-                <a:latin typeface="+mn-lt"/>
-                <a:ea typeface="+mn-ea"/>
-                <a:cs typeface="+mn-cs"/>
-              </a:defRPr>
-            </a:lvl6pPr>
-            <a:lvl7pPr marL="2743200" algn="l" defTabSz="914400" rtl="0" eaLnBrk="1" latinLnBrk="0" hangingPunct="1">
-              <a:defRPr sz="1800" kern="1200">
-                <a:solidFill>
-                  <a:schemeClr val="lt1"/>
-                </a:solidFill>
-                <a:latin typeface="+mn-lt"/>
-                <a:ea typeface="+mn-ea"/>
-                <a:cs typeface="+mn-cs"/>
-              </a:defRPr>
-            </a:lvl7pPr>
-            <a:lvl8pPr marL="3200400" algn="l" defTabSz="914400" rtl="0" eaLnBrk="1" latinLnBrk="0" hangingPunct="1">
-              <a:defRPr sz="1800" kern="1200">
-                <a:solidFill>
-                  <a:schemeClr val="lt1"/>
-                </a:solidFill>
-                <a:latin typeface="+mn-lt"/>
-                <a:ea typeface="+mn-ea"/>
-                <a:cs typeface="+mn-cs"/>
-              </a:defRPr>
-            </a:lvl8pPr>
-            <a:lvl9pPr marL="3657600" algn="l" defTabSz="914400" rtl="0" eaLnBrk="1" latinLnBrk="0" hangingPunct="1">
-              <a:defRPr sz="1800" kern="1200">
-                <a:solidFill>
-                  <a:schemeClr val="lt1"/>
-                </a:solidFill>
-                <a:latin typeface="+mn-lt"/>
-                <a:ea typeface="+mn-ea"/>
-                <a:cs typeface="+mn-cs"/>
-              </a:defRPr>
-            </a:lvl9pPr>
-          </a:lstStyle>
-          <a:p>
-            <a:pPr algn="ctr"/>
-            <a:r>
-              <a:rPr lang="en-US" sz="1400" dirty="0">
-                <a:cs typeface="Calibri"/>
-              </a:rPr>
-              <a:t>Display "Light is on"</a:t>
-            </a:r>
-          </a:p>
-        </p:txBody>
-      </p:sp>
-      <p:sp>
-        <p:nvSpPr>
-          <p:cNvPr id="13" name="Title 1">
-            <a:extLst>
-              <a:ext uri="{FF2B5EF4-FFF2-40B4-BE49-F238E27FC236}">
-                <a16:creationId xmlns:a16="http://schemas.microsoft.com/office/drawing/2014/main" id="{307B9C9B-9F4A-41FF-B0C9-B4B4B334A1F7}"/>
-              </a:ext>
-            </a:extLst>
-          </p:cNvPr>
-          <p:cNvSpPr txBox="1">
-            <a:spLocks/>
-          </p:cNvSpPr>
-          <p:nvPr/>
-        </p:nvSpPr>
-        <p:spPr>
-          <a:xfrm>
-            <a:off x="629557" y="392339"/>
-            <a:ext cx="10515600" cy="1325563"/>
-          </a:xfrm>
-          <a:prstGeom prst="rect">
-            <a:avLst/>
-          </a:prstGeom>
-        </p:spPr>
-        <p:txBody>
-          <a:bodyPr anchor="t"/>
-          <a:lstStyle>
-            <a:lvl1pPr algn="l" defTabSz="914400" rtl="0" eaLnBrk="1" latinLnBrk="0" hangingPunct="1">
-              <a:lnSpc>
-                <a:spcPct val="90000"/>
-              </a:lnSpc>
-              <a:spcBef>
-                <a:spcPct val="0"/>
-              </a:spcBef>
-              <a:buNone/>
-              <a:defRPr sz="4400" kern="1200">
-                <a:solidFill>
-                  <a:schemeClr val="tx1"/>
-                </a:solidFill>
-                <a:latin typeface="+mj-lt"/>
-                <a:ea typeface="+mj-ea"/>
-                <a:cs typeface="+mj-cs"/>
-              </a:defRPr>
-            </a:lvl1pPr>
-          </a:lstStyle>
-          <a:p>
-            <a:r>
-              <a:rPr lang="en-US" dirty="0"/>
-              <a:t>HTTP Post</a:t>
-            </a:r>
-          </a:p>
-        </p:txBody>
-      </p:sp>
-      <p:pic>
-        <p:nvPicPr>
-          <p:cNvPr id="14" name="Picture 14">
-            <a:extLst>
-              <a:ext uri="{FF2B5EF4-FFF2-40B4-BE49-F238E27FC236}">
-                <a16:creationId xmlns:a16="http://schemas.microsoft.com/office/drawing/2014/main" id="{CBB1AB9D-F100-4B0D-AB94-FC56AD6791E3}"/>
-              </a:ext>
-            </a:extLst>
-          </p:cNvPr>
-          <p:cNvPicPr>
-            <a:picLocks noChangeAspect="1"/>
-          </p:cNvPicPr>
-          <p:nvPr/>
-        </p:nvPicPr>
-        <p:blipFill>
-          <a:blip r:embed="rId4"/>
-          <a:stretch>
-            <a:fillRect/>
-          </a:stretch>
-        </p:blipFill>
-        <p:spPr>
-          <a:xfrm>
-            <a:off x="6021614" y="1717765"/>
-            <a:ext cx="1455058" cy="1580969"/>
-          </a:xfrm>
-          <a:prstGeom prst="rect">
-            <a:avLst/>
-          </a:prstGeom>
-        </p:spPr>
-      </p:pic>
-    </p:spTree>
-    <p:extLst>
-      <p:ext uri="{BB962C8B-B14F-4D97-AF65-F5344CB8AC3E}">
-        <p14:creationId xmlns:p14="http://schemas.microsoft.com/office/powerpoint/2010/main" val="834853381"/>
-      </p:ext>
-    </p:extLst>
-  </p:cSld>
-  <p:clrMapOvr>
-    <a:masterClrMapping/>
-  </p:clrMapOvr>
-</p:sld>
-</file>
-
-<file path=ppt/slides/slide19.xml><?xml version="1.0" encoding="utf-8"?>
-<p:sld xmlns:a="http://schemas.openxmlformats.org/drawingml/2006/main" xmlns:r="http://schemas.openxmlformats.org/officeDocument/2006/relationships" xmlns:p="http://schemas.openxmlformats.org/presentationml/2006/main">
-  <p:cSld>
-    <p:spTree>
-      <p:nvGrpSpPr>
-        <p:cNvPr id="1" name=""/>
-        <p:cNvGrpSpPr/>
-        <p:nvPr/>
-      </p:nvGrpSpPr>
-      <p:grpSpPr>
-        <a:xfrm>
-          <a:off x="0" y="0"/>
-          <a:ext cx="0" cy="0"/>
-          <a:chOff x="0" y="0"/>
-          <a:chExt cx="0" cy="0"/>
-        </a:xfrm>
-      </p:grpSpPr>
-      <p:sp>
-        <p:nvSpPr>
-          <p:cNvPr id="2" name="Title 1"/>
-          <p:cNvSpPr>
-            <a:spLocks noGrp="1"/>
-          </p:cNvSpPr>
-          <p:nvPr>
-            <p:ph type="title"/>
-          </p:nvPr>
-        </p:nvSpPr>
-        <p:spPr>
-          <a:xfrm>
-            <a:off x="841113" y="347033"/>
-            <a:ext cx="8534400" cy="758952"/>
-          </a:xfrm>
-        </p:spPr>
-        <p:txBody>
-          <a:bodyPr>
-            <a:normAutofit fontScale="90000"/>
-          </a:bodyPr>
-          <a:lstStyle/>
-          <a:p>
-            <a:r>
-              <a:rPr lang="en-IE" dirty="0"/>
-              <a:t>External Data Representations</a:t>
-            </a:r>
-            <a:br>
-              <a:rPr lang="en-IE" dirty="0">
-                <a:cs typeface="Calibri Light"/>
-              </a:rPr>
-            </a:br>
-            <a:r>
-              <a:rPr lang="en-IE" dirty="0"/>
-              <a:t>XML</a:t>
-            </a:r>
-          </a:p>
-        </p:txBody>
-      </p:sp>
-      <p:sp>
-        <p:nvSpPr>
-          <p:cNvPr id="3" name="Content Placeholder 2"/>
-          <p:cNvSpPr>
-            <a:spLocks noGrp="1"/>
-          </p:cNvSpPr>
-          <p:nvPr>
-            <p:ph sz="quarter" idx="1"/>
-          </p:nvPr>
-        </p:nvSpPr>
-        <p:spPr/>
-        <p:txBody>
-          <a:bodyPr vert="horz" lIns="91440" tIns="45720" rIns="91440" bIns="45720" rtlCol="0" anchor="t">
-            <a:normAutofit lnSpcReduction="10000"/>
-          </a:bodyPr>
-          <a:lstStyle/>
-          <a:p>
-            <a:r>
-              <a:rPr lang="en-IE" dirty="0" err="1"/>
-              <a:t>eXtensible</a:t>
-            </a:r>
-            <a:r>
-              <a:rPr lang="en-IE" dirty="0"/>
-              <a:t> </a:t>
-            </a:r>
-            <a:r>
-              <a:rPr lang="en-IE" dirty="0" err="1"/>
-              <a:t>Markup</a:t>
-            </a:r>
-            <a:r>
-              <a:rPr lang="en-IE" dirty="0"/>
-              <a:t> Language(XML)</a:t>
-            </a:r>
-          </a:p>
-          <a:p>
-            <a:r>
-              <a:rPr lang="en-IE" dirty="0"/>
-              <a:t>Same heritage as HTML(but XML is NOT HTML)</a:t>
-            </a:r>
-          </a:p>
-          <a:p>
-            <a:r>
-              <a:rPr lang="en-IE" dirty="0"/>
-              <a:t>XML data items are tagged with ‘</a:t>
-            </a:r>
-            <a:r>
-              <a:rPr lang="en-IE" dirty="0" err="1"/>
-              <a:t>markup</a:t>
-            </a:r>
-            <a:r>
-              <a:rPr lang="en-IE" dirty="0"/>
-              <a:t>’ strings</a:t>
-            </a:r>
-          </a:p>
-          <a:p>
-            <a:pPr lvl="1"/>
-            <a:r>
-              <a:rPr lang="en-IE" sz="2300" dirty="0"/>
-              <a:t>used to describe the logical structure of the data</a:t>
-            </a:r>
-          </a:p>
-          <a:p>
-            <a:r>
-              <a:rPr lang="en-IE" dirty="0"/>
-              <a:t>XML has many uses. For now we confine ourselves to external data representations</a:t>
-            </a:r>
-            <a:endParaRPr lang="en-IE" dirty="0">
-              <a:cs typeface="Calibri"/>
-            </a:endParaRPr>
-          </a:p>
-          <a:p>
-            <a:r>
-              <a:rPr lang="en-IE" dirty="0"/>
-              <a:t>Has many cool features including</a:t>
-            </a:r>
-          </a:p>
-          <a:p>
-            <a:pPr lvl="1"/>
-            <a:r>
-              <a:rPr lang="en-IE" dirty="0"/>
-              <a:t>Extensible</a:t>
-            </a:r>
-          </a:p>
-          <a:p>
-            <a:pPr lvl="1"/>
-            <a:r>
-              <a:rPr lang="en-IE" dirty="0"/>
-              <a:t>Textual</a:t>
-            </a:r>
-          </a:p>
-          <a:p>
-            <a:pPr lvl="1"/>
-            <a:r>
-              <a:rPr lang="en-IE" dirty="0"/>
-              <a:t>Kind of human readable and machine readable...</a:t>
-            </a:r>
-          </a:p>
-          <a:p>
-            <a:endParaRPr lang="en-IE" dirty="0"/>
-          </a:p>
-        </p:txBody>
-      </p:sp>
-    </p:spTree>
-    <p:extLst>
-      <p:ext uri="{BB962C8B-B14F-4D97-AF65-F5344CB8AC3E}">
-        <p14:creationId xmlns:p14="http://schemas.microsoft.com/office/powerpoint/2010/main" val="2782609743"/>
       </p:ext>
     </p:extLst>
   </p:cSld>
@@ -12034,6 +12212,943 @@
           <a:chExt cx="0" cy="0"/>
         </a:xfrm>
       </p:grpSpPr>
+      <p:pic>
+        <p:nvPicPr>
+          <p:cNvPr id="2" name="Picture 1" descr="A close up of a device&#10;&#10;Description generated with very high confidence">
+            <a:extLst>
+              <a:ext uri="{FF2B5EF4-FFF2-40B4-BE49-F238E27FC236}">
+                <a16:creationId xmlns:a16="http://schemas.microsoft.com/office/drawing/2014/main" id="{FDC7C3FD-30C2-4FE7-8B0E-783BB8308346}"/>
+              </a:ext>
+            </a:extLst>
+          </p:cNvPr>
+          <p:cNvPicPr>
+            <a:picLocks noChangeAspect="1"/>
+          </p:cNvPicPr>
+          <p:nvPr/>
+        </p:nvPicPr>
+        <p:blipFill>
+          <a:blip r:embed="rId2"/>
+          <a:stretch>
+            <a:fillRect/>
+          </a:stretch>
+        </p:blipFill>
+        <p:spPr>
+          <a:xfrm>
+            <a:off x="6070311" y="3245188"/>
+            <a:ext cx="1353901" cy="1390640"/>
+          </a:xfrm>
+          <a:prstGeom prst="rect">
+            <a:avLst/>
+          </a:prstGeom>
+        </p:spPr>
+      </p:pic>
+      <p:pic>
+        <p:nvPicPr>
+          <p:cNvPr id="3" name="Picture 2" descr="A close up of a logo&#10;&#10;Description generated with very high confidence">
+            <a:extLst>
+              <a:ext uri="{FF2B5EF4-FFF2-40B4-BE49-F238E27FC236}">
+                <a16:creationId xmlns:a16="http://schemas.microsoft.com/office/drawing/2014/main" id="{51015C5D-FE6B-4B41-BB71-196E38A81C0B}"/>
+              </a:ext>
+            </a:extLst>
+          </p:cNvPr>
+          <p:cNvPicPr>
+            <a:picLocks noChangeAspect="1"/>
+          </p:cNvPicPr>
+          <p:nvPr/>
+        </p:nvPicPr>
+        <p:blipFill>
+          <a:blip r:embed="rId3"/>
+          <a:stretch>
+            <a:fillRect/>
+          </a:stretch>
+        </p:blipFill>
+        <p:spPr>
+          <a:xfrm>
+            <a:off x="2723625" y="3370087"/>
+            <a:ext cx="770618" cy="1123042"/>
+          </a:xfrm>
+          <a:prstGeom prst="rect">
+            <a:avLst/>
+          </a:prstGeom>
+        </p:spPr>
+      </p:pic>
+      <p:sp>
+        <p:nvSpPr>
+          <p:cNvPr id="7" name="Arrow: Left 6">
+            <a:extLst>
+              <a:ext uri="{FF2B5EF4-FFF2-40B4-BE49-F238E27FC236}">
+                <a16:creationId xmlns:a16="http://schemas.microsoft.com/office/drawing/2014/main" id="{EAF6439E-6043-4937-B03C-CC139A02990B}"/>
+              </a:ext>
+            </a:extLst>
+          </p:cNvPr>
+          <p:cNvSpPr/>
+          <p:nvPr/>
+        </p:nvSpPr>
+        <p:spPr>
+          <a:xfrm>
+            <a:off x="3611082" y="3721897"/>
+            <a:ext cx="2520550" cy="212490"/>
+          </a:xfrm>
+          <a:prstGeom prst="leftArrow">
+            <a:avLst/>
+          </a:prstGeom>
+        </p:spPr>
+        <p:style>
+          <a:lnRef idx="2">
+            <a:schemeClr val="accent1">
+              <a:shade val="50000"/>
+            </a:schemeClr>
+          </a:lnRef>
+          <a:fillRef idx="1">
+            <a:schemeClr val="accent1"/>
+          </a:fillRef>
+          <a:effectRef idx="0">
+            <a:schemeClr val="accent1"/>
+          </a:effectRef>
+          <a:fontRef idx="minor">
+            <a:schemeClr val="lt1"/>
+          </a:fontRef>
+        </p:style>
+        <p:txBody>
+          <a:bodyPr rot="0" spcFirstLastPara="0" vert="horz" wrap="square" lIns="91440" tIns="45720" rIns="91440" bIns="45720" numCol="1" spcCol="0" rtlCol="0" fromWordArt="0" anchor="ctr" anchorCtr="0" forceAA="0" compatLnSpc="1">
+            <a:prstTxWarp prst="textNoShape">
+              <a:avLst/>
+            </a:prstTxWarp>
+            <a:noAutofit/>
+          </a:bodyPr>
+          <a:lstStyle>
+            <a:defPPr>
+              <a:defRPr lang="en-US"/>
+            </a:defPPr>
+            <a:lvl1pPr marL="0" algn="l" defTabSz="914400" rtl="0" eaLnBrk="1" latinLnBrk="0" hangingPunct="1">
+              <a:defRPr sz="1800" kern="1200">
+                <a:solidFill>
+                  <a:schemeClr val="lt1"/>
+                </a:solidFill>
+                <a:latin typeface="+mn-lt"/>
+                <a:ea typeface="+mn-ea"/>
+                <a:cs typeface="+mn-cs"/>
+              </a:defRPr>
+            </a:lvl1pPr>
+            <a:lvl2pPr marL="457200" algn="l" defTabSz="914400" rtl="0" eaLnBrk="1" latinLnBrk="0" hangingPunct="1">
+              <a:defRPr sz="1800" kern="1200">
+                <a:solidFill>
+                  <a:schemeClr val="lt1"/>
+                </a:solidFill>
+                <a:latin typeface="+mn-lt"/>
+                <a:ea typeface="+mn-ea"/>
+                <a:cs typeface="+mn-cs"/>
+              </a:defRPr>
+            </a:lvl2pPr>
+            <a:lvl3pPr marL="914400" algn="l" defTabSz="914400" rtl="0" eaLnBrk="1" latinLnBrk="0" hangingPunct="1">
+              <a:defRPr sz="1800" kern="1200">
+                <a:solidFill>
+                  <a:schemeClr val="lt1"/>
+                </a:solidFill>
+                <a:latin typeface="+mn-lt"/>
+                <a:ea typeface="+mn-ea"/>
+                <a:cs typeface="+mn-cs"/>
+              </a:defRPr>
+            </a:lvl3pPr>
+            <a:lvl4pPr marL="1371600" algn="l" defTabSz="914400" rtl="0" eaLnBrk="1" latinLnBrk="0" hangingPunct="1">
+              <a:defRPr sz="1800" kern="1200">
+                <a:solidFill>
+                  <a:schemeClr val="lt1"/>
+                </a:solidFill>
+                <a:latin typeface="+mn-lt"/>
+                <a:ea typeface="+mn-ea"/>
+                <a:cs typeface="+mn-cs"/>
+              </a:defRPr>
+            </a:lvl4pPr>
+            <a:lvl5pPr marL="1828800" algn="l" defTabSz="914400" rtl="0" eaLnBrk="1" latinLnBrk="0" hangingPunct="1">
+              <a:defRPr sz="1800" kern="1200">
+                <a:solidFill>
+                  <a:schemeClr val="lt1"/>
+                </a:solidFill>
+                <a:latin typeface="+mn-lt"/>
+                <a:ea typeface="+mn-ea"/>
+                <a:cs typeface="+mn-cs"/>
+              </a:defRPr>
+            </a:lvl5pPr>
+            <a:lvl6pPr marL="2286000" algn="l" defTabSz="914400" rtl="0" eaLnBrk="1" latinLnBrk="0" hangingPunct="1">
+              <a:defRPr sz="1800" kern="1200">
+                <a:solidFill>
+                  <a:schemeClr val="lt1"/>
+                </a:solidFill>
+                <a:latin typeface="+mn-lt"/>
+                <a:ea typeface="+mn-ea"/>
+                <a:cs typeface="+mn-cs"/>
+              </a:defRPr>
+            </a:lvl6pPr>
+            <a:lvl7pPr marL="2743200" algn="l" defTabSz="914400" rtl="0" eaLnBrk="1" latinLnBrk="0" hangingPunct="1">
+              <a:defRPr sz="1800" kern="1200">
+                <a:solidFill>
+                  <a:schemeClr val="lt1"/>
+                </a:solidFill>
+                <a:latin typeface="+mn-lt"/>
+                <a:ea typeface="+mn-ea"/>
+                <a:cs typeface="+mn-cs"/>
+              </a:defRPr>
+            </a:lvl7pPr>
+            <a:lvl8pPr marL="3200400" algn="l" defTabSz="914400" rtl="0" eaLnBrk="1" latinLnBrk="0" hangingPunct="1">
+              <a:defRPr sz="1800" kern="1200">
+                <a:solidFill>
+                  <a:schemeClr val="lt1"/>
+                </a:solidFill>
+                <a:latin typeface="+mn-lt"/>
+                <a:ea typeface="+mn-ea"/>
+                <a:cs typeface="+mn-cs"/>
+              </a:defRPr>
+            </a:lvl8pPr>
+            <a:lvl9pPr marL="3657600" algn="l" defTabSz="914400" rtl="0" eaLnBrk="1" latinLnBrk="0" hangingPunct="1">
+              <a:defRPr sz="1800" kern="1200">
+                <a:solidFill>
+                  <a:schemeClr val="lt1"/>
+                </a:solidFill>
+                <a:latin typeface="+mn-lt"/>
+                <a:ea typeface="+mn-ea"/>
+                <a:cs typeface="+mn-cs"/>
+              </a:defRPr>
+            </a:lvl9pPr>
+          </a:lstStyle>
+          <a:p>
+            <a:pPr algn="ctr"/>
+            <a:endParaRPr lang="en-US"/>
+          </a:p>
+        </p:txBody>
+      </p:sp>
+      <p:sp>
+        <p:nvSpPr>
+          <p:cNvPr id="8" name="TextBox 7">
+            <a:extLst>
+              <a:ext uri="{FF2B5EF4-FFF2-40B4-BE49-F238E27FC236}">
+                <a16:creationId xmlns:a16="http://schemas.microsoft.com/office/drawing/2014/main" id="{D54619FB-A9E0-460B-ACD4-9F5DFFF49AE2}"/>
+              </a:ext>
+            </a:extLst>
+          </p:cNvPr>
+          <p:cNvSpPr txBox="1"/>
+          <p:nvPr/>
+        </p:nvSpPr>
+        <p:spPr>
+          <a:xfrm>
+            <a:off x="3454399" y="3427184"/>
+            <a:ext cx="2743200" cy="369332"/>
+          </a:xfrm>
+          <a:prstGeom prst="rect">
+            <a:avLst/>
+          </a:prstGeom>
+        </p:spPr>
+        <p:txBody>
+          <a:bodyPr rot="0" spcFirstLastPara="0" vert="horz" wrap="square" lIns="91440" tIns="45720" rIns="91440" bIns="45720" numCol="1" spcCol="0" rtlCol="0" fromWordArt="0" anchor="t" anchorCtr="0" forceAA="0" compatLnSpc="1">
+            <a:prstTxWarp prst="textNoShape">
+              <a:avLst/>
+            </a:prstTxWarp>
+            <a:spAutoFit/>
+          </a:bodyPr>
+          <a:lstStyle>
+            <a:defPPr>
+              <a:defRPr lang="en-US"/>
+            </a:defPPr>
+            <a:lvl1pPr marL="0" algn="l" defTabSz="914400" rtl="0" eaLnBrk="1" latinLnBrk="0" hangingPunct="1">
+              <a:defRPr sz="1800" kern="1200">
+                <a:solidFill>
+                  <a:schemeClr val="tx1"/>
+                </a:solidFill>
+                <a:latin typeface="+mn-lt"/>
+                <a:ea typeface="+mn-ea"/>
+                <a:cs typeface="+mn-cs"/>
+              </a:defRPr>
+            </a:lvl1pPr>
+            <a:lvl2pPr marL="457200" algn="l" defTabSz="914400" rtl="0" eaLnBrk="1" latinLnBrk="0" hangingPunct="1">
+              <a:defRPr sz="1800" kern="1200">
+                <a:solidFill>
+                  <a:schemeClr val="tx1"/>
+                </a:solidFill>
+                <a:latin typeface="+mn-lt"/>
+                <a:ea typeface="+mn-ea"/>
+                <a:cs typeface="+mn-cs"/>
+              </a:defRPr>
+            </a:lvl2pPr>
+            <a:lvl3pPr marL="914400" algn="l" defTabSz="914400" rtl="0" eaLnBrk="1" latinLnBrk="0" hangingPunct="1">
+              <a:defRPr sz="1800" kern="1200">
+                <a:solidFill>
+                  <a:schemeClr val="tx1"/>
+                </a:solidFill>
+                <a:latin typeface="+mn-lt"/>
+                <a:ea typeface="+mn-ea"/>
+                <a:cs typeface="+mn-cs"/>
+              </a:defRPr>
+            </a:lvl3pPr>
+            <a:lvl4pPr marL="1371600" algn="l" defTabSz="914400" rtl="0" eaLnBrk="1" latinLnBrk="0" hangingPunct="1">
+              <a:defRPr sz="1800" kern="1200">
+                <a:solidFill>
+                  <a:schemeClr val="tx1"/>
+                </a:solidFill>
+                <a:latin typeface="+mn-lt"/>
+                <a:ea typeface="+mn-ea"/>
+                <a:cs typeface="+mn-cs"/>
+              </a:defRPr>
+            </a:lvl4pPr>
+            <a:lvl5pPr marL="1828800" algn="l" defTabSz="914400" rtl="0" eaLnBrk="1" latinLnBrk="0" hangingPunct="1">
+              <a:defRPr sz="1800" kern="1200">
+                <a:solidFill>
+                  <a:schemeClr val="tx1"/>
+                </a:solidFill>
+                <a:latin typeface="+mn-lt"/>
+                <a:ea typeface="+mn-ea"/>
+                <a:cs typeface="+mn-cs"/>
+              </a:defRPr>
+            </a:lvl5pPr>
+            <a:lvl6pPr marL="2286000" algn="l" defTabSz="914400" rtl="0" eaLnBrk="1" latinLnBrk="0" hangingPunct="1">
+              <a:defRPr sz="1800" kern="1200">
+                <a:solidFill>
+                  <a:schemeClr val="tx1"/>
+                </a:solidFill>
+                <a:latin typeface="+mn-lt"/>
+                <a:ea typeface="+mn-ea"/>
+                <a:cs typeface="+mn-cs"/>
+              </a:defRPr>
+            </a:lvl6pPr>
+            <a:lvl7pPr marL="2743200" algn="l" defTabSz="914400" rtl="0" eaLnBrk="1" latinLnBrk="0" hangingPunct="1">
+              <a:defRPr sz="1800" kern="1200">
+                <a:solidFill>
+                  <a:schemeClr val="tx1"/>
+                </a:solidFill>
+                <a:latin typeface="+mn-lt"/>
+                <a:ea typeface="+mn-ea"/>
+                <a:cs typeface="+mn-cs"/>
+              </a:defRPr>
+            </a:lvl7pPr>
+            <a:lvl8pPr marL="3200400" algn="l" defTabSz="914400" rtl="0" eaLnBrk="1" latinLnBrk="0" hangingPunct="1">
+              <a:defRPr sz="1800" kern="1200">
+                <a:solidFill>
+                  <a:schemeClr val="tx1"/>
+                </a:solidFill>
+                <a:latin typeface="+mn-lt"/>
+                <a:ea typeface="+mn-ea"/>
+                <a:cs typeface="+mn-cs"/>
+              </a:defRPr>
+            </a:lvl8pPr>
+            <a:lvl9pPr marL="3657600" algn="l" defTabSz="914400" rtl="0" eaLnBrk="1" latinLnBrk="0" hangingPunct="1">
+              <a:defRPr sz="1800" kern="1200">
+                <a:solidFill>
+                  <a:schemeClr val="tx1"/>
+                </a:solidFill>
+                <a:latin typeface="+mn-lt"/>
+                <a:ea typeface="+mn-ea"/>
+                <a:cs typeface="+mn-cs"/>
+              </a:defRPr>
+            </a:lvl9pPr>
+          </a:lstStyle>
+          <a:p>
+            <a:pPr algn="ctr"/>
+            <a:r>
+              <a:rPr lang="en-US" dirty="0"/>
+              <a:t>HTTP Response</a:t>
+            </a:r>
+          </a:p>
+        </p:txBody>
+      </p:sp>
+      <p:sp>
+        <p:nvSpPr>
+          <p:cNvPr id="9" name="TextBox 8">
+            <a:extLst>
+              <a:ext uri="{FF2B5EF4-FFF2-40B4-BE49-F238E27FC236}">
+                <a16:creationId xmlns:a16="http://schemas.microsoft.com/office/drawing/2014/main" id="{AAD1317E-EE50-45D7-B093-C9B2224F790A}"/>
+              </a:ext>
+            </a:extLst>
+          </p:cNvPr>
+          <p:cNvSpPr txBox="1"/>
+          <p:nvPr/>
+        </p:nvSpPr>
+        <p:spPr>
+          <a:xfrm>
+            <a:off x="4034969" y="3944256"/>
+            <a:ext cx="1854199" cy="738664"/>
+          </a:xfrm>
+          <a:prstGeom prst="rect">
+            <a:avLst/>
+          </a:prstGeom>
+          <a:ln>
+            <a:solidFill>
+              <a:schemeClr val="tx1">
+                <a:lumMod val="95000"/>
+                <a:lumOff val="5000"/>
+              </a:schemeClr>
+            </a:solidFill>
+          </a:ln>
+        </p:spPr>
+        <p:txBody>
+          <a:bodyPr rot="0" spcFirstLastPara="0" vert="horz" wrap="square" lIns="91440" tIns="45720" rIns="91440" bIns="45720" numCol="1" spcCol="0" rtlCol="0" fromWordArt="0" anchor="t" anchorCtr="0" forceAA="0" compatLnSpc="1">
+            <a:prstTxWarp prst="textNoShape">
+              <a:avLst/>
+            </a:prstTxWarp>
+            <a:spAutoFit/>
+          </a:bodyPr>
+          <a:lstStyle>
+            <a:defPPr>
+              <a:defRPr lang="en-US"/>
+            </a:defPPr>
+            <a:lvl1pPr marL="0" algn="l" defTabSz="914400" rtl="0" eaLnBrk="1" latinLnBrk="0" hangingPunct="1">
+              <a:defRPr sz="1800" kern="1200">
+                <a:solidFill>
+                  <a:schemeClr val="tx1"/>
+                </a:solidFill>
+                <a:latin typeface="+mn-lt"/>
+                <a:ea typeface="+mn-ea"/>
+                <a:cs typeface="+mn-cs"/>
+              </a:defRPr>
+            </a:lvl1pPr>
+            <a:lvl2pPr marL="457200" algn="l" defTabSz="914400" rtl="0" eaLnBrk="1" latinLnBrk="0" hangingPunct="1">
+              <a:defRPr sz="1800" kern="1200">
+                <a:solidFill>
+                  <a:schemeClr val="tx1"/>
+                </a:solidFill>
+                <a:latin typeface="+mn-lt"/>
+                <a:ea typeface="+mn-ea"/>
+                <a:cs typeface="+mn-cs"/>
+              </a:defRPr>
+            </a:lvl2pPr>
+            <a:lvl3pPr marL="914400" algn="l" defTabSz="914400" rtl="0" eaLnBrk="1" latinLnBrk="0" hangingPunct="1">
+              <a:defRPr sz="1800" kern="1200">
+                <a:solidFill>
+                  <a:schemeClr val="tx1"/>
+                </a:solidFill>
+                <a:latin typeface="+mn-lt"/>
+                <a:ea typeface="+mn-ea"/>
+                <a:cs typeface="+mn-cs"/>
+              </a:defRPr>
+            </a:lvl3pPr>
+            <a:lvl4pPr marL="1371600" algn="l" defTabSz="914400" rtl="0" eaLnBrk="1" latinLnBrk="0" hangingPunct="1">
+              <a:defRPr sz="1800" kern="1200">
+                <a:solidFill>
+                  <a:schemeClr val="tx1"/>
+                </a:solidFill>
+                <a:latin typeface="+mn-lt"/>
+                <a:ea typeface="+mn-ea"/>
+                <a:cs typeface="+mn-cs"/>
+              </a:defRPr>
+            </a:lvl4pPr>
+            <a:lvl5pPr marL="1828800" algn="l" defTabSz="914400" rtl="0" eaLnBrk="1" latinLnBrk="0" hangingPunct="1">
+              <a:defRPr sz="1800" kern="1200">
+                <a:solidFill>
+                  <a:schemeClr val="tx1"/>
+                </a:solidFill>
+                <a:latin typeface="+mn-lt"/>
+                <a:ea typeface="+mn-ea"/>
+                <a:cs typeface="+mn-cs"/>
+              </a:defRPr>
+            </a:lvl5pPr>
+            <a:lvl6pPr marL="2286000" algn="l" defTabSz="914400" rtl="0" eaLnBrk="1" latinLnBrk="0" hangingPunct="1">
+              <a:defRPr sz="1800" kern="1200">
+                <a:solidFill>
+                  <a:schemeClr val="tx1"/>
+                </a:solidFill>
+                <a:latin typeface="+mn-lt"/>
+                <a:ea typeface="+mn-ea"/>
+                <a:cs typeface="+mn-cs"/>
+              </a:defRPr>
+            </a:lvl6pPr>
+            <a:lvl7pPr marL="2743200" algn="l" defTabSz="914400" rtl="0" eaLnBrk="1" latinLnBrk="0" hangingPunct="1">
+              <a:defRPr sz="1800" kern="1200">
+                <a:solidFill>
+                  <a:schemeClr val="tx1"/>
+                </a:solidFill>
+                <a:latin typeface="+mn-lt"/>
+                <a:ea typeface="+mn-ea"/>
+                <a:cs typeface="+mn-cs"/>
+              </a:defRPr>
+            </a:lvl7pPr>
+            <a:lvl8pPr marL="3200400" algn="l" defTabSz="914400" rtl="0" eaLnBrk="1" latinLnBrk="0" hangingPunct="1">
+              <a:defRPr sz="1800" kern="1200">
+                <a:solidFill>
+                  <a:schemeClr val="tx1"/>
+                </a:solidFill>
+                <a:latin typeface="+mn-lt"/>
+                <a:ea typeface="+mn-ea"/>
+                <a:cs typeface="+mn-cs"/>
+              </a:defRPr>
+            </a:lvl8pPr>
+            <a:lvl9pPr marL="3657600" algn="l" defTabSz="914400" rtl="0" eaLnBrk="1" latinLnBrk="0" hangingPunct="1">
+              <a:defRPr sz="1800" kern="1200">
+                <a:solidFill>
+                  <a:schemeClr val="tx1"/>
+                </a:solidFill>
+                <a:latin typeface="+mn-lt"/>
+                <a:ea typeface="+mn-ea"/>
+                <a:cs typeface="+mn-cs"/>
+              </a:defRPr>
+            </a:lvl9pPr>
+          </a:lstStyle>
+          <a:p>
+            <a:pPr algn="ctr"/>
+            <a:r>
+              <a:rPr lang="en-US" sz="1400" dirty="0">
+                <a:cs typeface="Calibri"/>
+              </a:rPr>
+              <a:t>200 OK</a:t>
+            </a:r>
+          </a:p>
+          <a:p>
+            <a:pPr algn="ctr"/>
+            <a:r>
+              <a:rPr lang="en-US" sz="1400" dirty="0"/>
+              <a:t>{"</a:t>
+            </a:r>
+            <a:r>
+              <a:rPr lang="en-US" sz="1400" dirty="0" err="1"/>
+              <a:t>status":"on</a:t>
+            </a:r>
+            <a:r>
+              <a:rPr lang="en-US" sz="1400" dirty="0"/>
+              <a:t>", "</a:t>
+            </a:r>
+            <a:r>
+              <a:rPr lang="en-US" sz="1400" dirty="0" err="1"/>
+              <a:t>colour</a:t>
+            </a:r>
+            <a:r>
+              <a:rPr lang="en-US" sz="1400" dirty="0"/>
+              <a:t>":"white"}</a:t>
+            </a:r>
+            <a:endParaRPr lang="en-US" sz="1400" dirty="0">
+              <a:cs typeface="Calibri"/>
+            </a:endParaRPr>
+          </a:p>
+        </p:txBody>
+      </p:sp>
+      <p:sp>
+        <p:nvSpPr>
+          <p:cNvPr id="10" name="Speech Bubble: Rectangle with Corners Rounded 9">
+            <a:extLst>
+              <a:ext uri="{FF2B5EF4-FFF2-40B4-BE49-F238E27FC236}">
+                <a16:creationId xmlns:a16="http://schemas.microsoft.com/office/drawing/2014/main" id="{C94A3CFF-9B7C-4141-91A1-D61B8E109DB7}"/>
+              </a:ext>
+            </a:extLst>
+          </p:cNvPr>
+          <p:cNvSpPr/>
+          <p:nvPr/>
+        </p:nvSpPr>
+        <p:spPr>
+          <a:xfrm>
+            <a:off x="2463800" y="2669103"/>
+            <a:ext cx="1422399" cy="576363"/>
+          </a:xfrm>
+          <a:prstGeom prst="wedgeRoundRectCallout">
+            <a:avLst/>
+          </a:prstGeom>
+        </p:spPr>
+        <p:style>
+          <a:lnRef idx="2">
+            <a:schemeClr val="accent1">
+              <a:shade val="50000"/>
+            </a:schemeClr>
+          </a:lnRef>
+          <a:fillRef idx="1">
+            <a:schemeClr val="accent1"/>
+          </a:fillRef>
+          <a:effectRef idx="0">
+            <a:schemeClr val="accent1"/>
+          </a:effectRef>
+          <a:fontRef idx="minor">
+            <a:schemeClr val="lt1"/>
+          </a:fontRef>
+        </p:style>
+        <p:txBody>
+          <a:bodyPr rot="0" spcFirstLastPara="0" vert="horz" wrap="square" lIns="91440" tIns="45720" rIns="91440" bIns="45720" numCol="1" spcCol="0" rtlCol="0" fromWordArt="0" anchor="ctr" anchorCtr="0" forceAA="0" compatLnSpc="1">
+            <a:prstTxWarp prst="textNoShape">
+              <a:avLst/>
+            </a:prstTxWarp>
+            <a:noAutofit/>
+          </a:bodyPr>
+          <a:lstStyle>
+            <a:defPPr>
+              <a:defRPr lang="en-US"/>
+            </a:defPPr>
+            <a:lvl1pPr marL="0" algn="l" defTabSz="914400" rtl="0" eaLnBrk="1" latinLnBrk="0" hangingPunct="1">
+              <a:defRPr sz="1800" kern="1200">
+                <a:solidFill>
+                  <a:schemeClr val="lt1"/>
+                </a:solidFill>
+                <a:latin typeface="+mn-lt"/>
+                <a:ea typeface="+mn-ea"/>
+                <a:cs typeface="+mn-cs"/>
+              </a:defRPr>
+            </a:lvl1pPr>
+            <a:lvl2pPr marL="457200" algn="l" defTabSz="914400" rtl="0" eaLnBrk="1" latinLnBrk="0" hangingPunct="1">
+              <a:defRPr sz="1800" kern="1200">
+                <a:solidFill>
+                  <a:schemeClr val="lt1"/>
+                </a:solidFill>
+                <a:latin typeface="+mn-lt"/>
+                <a:ea typeface="+mn-ea"/>
+                <a:cs typeface="+mn-cs"/>
+              </a:defRPr>
+            </a:lvl2pPr>
+            <a:lvl3pPr marL="914400" algn="l" defTabSz="914400" rtl="0" eaLnBrk="1" latinLnBrk="0" hangingPunct="1">
+              <a:defRPr sz="1800" kern="1200">
+                <a:solidFill>
+                  <a:schemeClr val="lt1"/>
+                </a:solidFill>
+                <a:latin typeface="+mn-lt"/>
+                <a:ea typeface="+mn-ea"/>
+                <a:cs typeface="+mn-cs"/>
+              </a:defRPr>
+            </a:lvl3pPr>
+            <a:lvl4pPr marL="1371600" algn="l" defTabSz="914400" rtl="0" eaLnBrk="1" latinLnBrk="0" hangingPunct="1">
+              <a:defRPr sz="1800" kern="1200">
+                <a:solidFill>
+                  <a:schemeClr val="lt1"/>
+                </a:solidFill>
+                <a:latin typeface="+mn-lt"/>
+                <a:ea typeface="+mn-ea"/>
+                <a:cs typeface="+mn-cs"/>
+              </a:defRPr>
+            </a:lvl4pPr>
+            <a:lvl5pPr marL="1828800" algn="l" defTabSz="914400" rtl="0" eaLnBrk="1" latinLnBrk="0" hangingPunct="1">
+              <a:defRPr sz="1800" kern="1200">
+                <a:solidFill>
+                  <a:schemeClr val="lt1"/>
+                </a:solidFill>
+                <a:latin typeface="+mn-lt"/>
+                <a:ea typeface="+mn-ea"/>
+                <a:cs typeface="+mn-cs"/>
+              </a:defRPr>
+            </a:lvl5pPr>
+            <a:lvl6pPr marL="2286000" algn="l" defTabSz="914400" rtl="0" eaLnBrk="1" latinLnBrk="0" hangingPunct="1">
+              <a:defRPr sz="1800" kern="1200">
+                <a:solidFill>
+                  <a:schemeClr val="lt1"/>
+                </a:solidFill>
+                <a:latin typeface="+mn-lt"/>
+                <a:ea typeface="+mn-ea"/>
+                <a:cs typeface="+mn-cs"/>
+              </a:defRPr>
+            </a:lvl6pPr>
+            <a:lvl7pPr marL="2743200" algn="l" defTabSz="914400" rtl="0" eaLnBrk="1" latinLnBrk="0" hangingPunct="1">
+              <a:defRPr sz="1800" kern="1200">
+                <a:solidFill>
+                  <a:schemeClr val="lt1"/>
+                </a:solidFill>
+                <a:latin typeface="+mn-lt"/>
+                <a:ea typeface="+mn-ea"/>
+                <a:cs typeface="+mn-cs"/>
+              </a:defRPr>
+            </a:lvl7pPr>
+            <a:lvl8pPr marL="3200400" algn="l" defTabSz="914400" rtl="0" eaLnBrk="1" latinLnBrk="0" hangingPunct="1">
+              <a:defRPr sz="1800" kern="1200">
+                <a:solidFill>
+                  <a:schemeClr val="lt1"/>
+                </a:solidFill>
+                <a:latin typeface="+mn-lt"/>
+                <a:ea typeface="+mn-ea"/>
+                <a:cs typeface="+mn-cs"/>
+              </a:defRPr>
+            </a:lvl8pPr>
+            <a:lvl9pPr marL="3657600" algn="l" defTabSz="914400" rtl="0" eaLnBrk="1" latinLnBrk="0" hangingPunct="1">
+              <a:defRPr sz="1800" kern="1200">
+                <a:solidFill>
+                  <a:schemeClr val="lt1"/>
+                </a:solidFill>
+                <a:latin typeface="+mn-lt"/>
+                <a:ea typeface="+mn-ea"/>
+                <a:cs typeface="+mn-cs"/>
+              </a:defRPr>
+            </a:lvl9pPr>
+          </a:lstStyle>
+          <a:p>
+            <a:pPr algn="ctr"/>
+            <a:r>
+              <a:rPr lang="en-US" sz="1400" dirty="0">
+                <a:cs typeface="Calibri"/>
+              </a:rPr>
+              <a:t>Display "Light is on"</a:t>
+            </a:r>
+          </a:p>
+        </p:txBody>
+      </p:sp>
+      <p:sp>
+        <p:nvSpPr>
+          <p:cNvPr id="13" name="Title 1">
+            <a:extLst>
+              <a:ext uri="{FF2B5EF4-FFF2-40B4-BE49-F238E27FC236}">
+                <a16:creationId xmlns:a16="http://schemas.microsoft.com/office/drawing/2014/main" id="{307B9C9B-9F4A-41FF-B0C9-B4B4B334A1F7}"/>
+              </a:ext>
+            </a:extLst>
+          </p:cNvPr>
+          <p:cNvSpPr txBox="1">
+            <a:spLocks/>
+          </p:cNvSpPr>
+          <p:nvPr/>
+        </p:nvSpPr>
+        <p:spPr>
+          <a:xfrm>
+            <a:off x="629557" y="392339"/>
+            <a:ext cx="10515600" cy="1325563"/>
+          </a:xfrm>
+          <a:prstGeom prst="rect">
+            <a:avLst/>
+          </a:prstGeom>
+        </p:spPr>
+        <p:txBody>
+          <a:bodyPr anchor="t"/>
+          <a:lstStyle>
+            <a:lvl1pPr algn="l" defTabSz="914400" rtl="0" eaLnBrk="1" latinLnBrk="0" hangingPunct="1">
+              <a:lnSpc>
+                <a:spcPct val="90000"/>
+              </a:lnSpc>
+              <a:spcBef>
+                <a:spcPct val="0"/>
+              </a:spcBef>
+              <a:buNone/>
+              <a:defRPr sz="4400" kern="1200">
+                <a:solidFill>
+                  <a:schemeClr val="tx1"/>
+                </a:solidFill>
+                <a:latin typeface="+mj-lt"/>
+                <a:ea typeface="+mj-ea"/>
+                <a:cs typeface="+mj-cs"/>
+              </a:defRPr>
+            </a:lvl1pPr>
+          </a:lstStyle>
+          <a:p>
+            <a:r>
+              <a:rPr lang="en-US" dirty="0"/>
+              <a:t>HTTP Post</a:t>
+            </a:r>
+          </a:p>
+        </p:txBody>
+      </p:sp>
+      <p:pic>
+        <p:nvPicPr>
+          <p:cNvPr id="14" name="Picture 14">
+            <a:extLst>
+              <a:ext uri="{FF2B5EF4-FFF2-40B4-BE49-F238E27FC236}">
+                <a16:creationId xmlns:a16="http://schemas.microsoft.com/office/drawing/2014/main" id="{CBB1AB9D-F100-4B0D-AB94-FC56AD6791E3}"/>
+              </a:ext>
+            </a:extLst>
+          </p:cNvPr>
+          <p:cNvPicPr>
+            <a:picLocks noChangeAspect="1"/>
+          </p:cNvPicPr>
+          <p:nvPr/>
+        </p:nvPicPr>
+        <p:blipFill>
+          <a:blip r:embed="rId4"/>
+          <a:stretch>
+            <a:fillRect/>
+          </a:stretch>
+        </p:blipFill>
+        <p:spPr>
+          <a:xfrm>
+            <a:off x="6021614" y="1717765"/>
+            <a:ext cx="1455058" cy="1580969"/>
+          </a:xfrm>
+          <a:prstGeom prst="rect">
+            <a:avLst/>
+          </a:prstGeom>
+        </p:spPr>
+      </p:pic>
+    </p:spTree>
+    <p:extLst>
+      <p:ext uri="{BB962C8B-B14F-4D97-AF65-F5344CB8AC3E}">
+        <p14:creationId xmlns:p14="http://schemas.microsoft.com/office/powerpoint/2010/main" val="834853381"/>
+      </p:ext>
+    </p:extLst>
+  </p:cSld>
+  <p:clrMapOvr>
+    <a:masterClrMapping/>
+  </p:clrMapOvr>
+</p:sld>
+</file>
+
+<file path=ppt/slides/slide21.xml><?xml version="1.0" encoding="utf-8"?>
+<p:sld xmlns:a="http://schemas.openxmlformats.org/drawingml/2006/main" xmlns:r="http://schemas.openxmlformats.org/officeDocument/2006/relationships" xmlns:p="http://schemas.openxmlformats.org/presentationml/2006/main">
+  <p:cSld>
+    <p:spTree>
+      <p:nvGrpSpPr>
+        <p:cNvPr id="1" name=""/>
+        <p:cNvGrpSpPr/>
+        <p:nvPr/>
+      </p:nvGrpSpPr>
+      <p:grpSpPr>
+        <a:xfrm>
+          <a:off x="0" y="0"/>
+          <a:ext cx="0" cy="0"/>
+          <a:chOff x="0" y="0"/>
+          <a:chExt cx="0" cy="0"/>
+        </a:xfrm>
+      </p:grpSpPr>
+      <p:sp>
+        <p:nvSpPr>
+          <p:cNvPr id="2" name="Title 1"/>
+          <p:cNvSpPr>
+            <a:spLocks noGrp="1"/>
+          </p:cNvSpPr>
+          <p:nvPr>
+            <p:ph type="title"/>
+          </p:nvPr>
+        </p:nvSpPr>
+        <p:spPr>
+          <a:xfrm>
+            <a:off x="841113" y="347033"/>
+            <a:ext cx="8534400" cy="758952"/>
+          </a:xfrm>
+        </p:spPr>
+        <p:txBody>
+          <a:bodyPr>
+            <a:normAutofit fontScale="90000"/>
+          </a:bodyPr>
+          <a:lstStyle/>
+          <a:p>
+            <a:r>
+              <a:rPr lang="en-IE" dirty="0"/>
+              <a:t>External Data Representations</a:t>
+            </a:r>
+            <a:br>
+              <a:rPr lang="en-IE" dirty="0">
+                <a:cs typeface="Calibri Light"/>
+              </a:rPr>
+            </a:br>
+            <a:r>
+              <a:rPr lang="en-IE" dirty="0"/>
+              <a:t>XML</a:t>
+            </a:r>
+          </a:p>
+        </p:txBody>
+      </p:sp>
+      <p:sp>
+        <p:nvSpPr>
+          <p:cNvPr id="3" name="Content Placeholder 2"/>
+          <p:cNvSpPr>
+            <a:spLocks noGrp="1"/>
+          </p:cNvSpPr>
+          <p:nvPr>
+            <p:ph sz="quarter" idx="1"/>
+          </p:nvPr>
+        </p:nvSpPr>
+        <p:spPr/>
+        <p:txBody>
+          <a:bodyPr vert="horz" lIns="91440" tIns="45720" rIns="91440" bIns="45720" rtlCol="0" anchor="t">
+            <a:normAutofit lnSpcReduction="10000"/>
+          </a:bodyPr>
+          <a:lstStyle/>
+          <a:p>
+            <a:r>
+              <a:rPr lang="en-IE" dirty="0" err="1"/>
+              <a:t>eXtensible</a:t>
+            </a:r>
+            <a:r>
+              <a:rPr lang="en-IE" dirty="0"/>
+              <a:t> </a:t>
+            </a:r>
+            <a:r>
+              <a:rPr lang="en-IE" dirty="0" err="1"/>
+              <a:t>Markup</a:t>
+            </a:r>
+            <a:r>
+              <a:rPr lang="en-IE" dirty="0"/>
+              <a:t> Language(XML)</a:t>
+            </a:r>
+          </a:p>
+          <a:p>
+            <a:r>
+              <a:rPr lang="en-IE" dirty="0"/>
+              <a:t>Same heritage as HTML(but XML is NOT HTML)</a:t>
+            </a:r>
+          </a:p>
+          <a:p>
+            <a:r>
+              <a:rPr lang="en-IE" dirty="0"/>
+              <a:t>XML data items are tagged with ‘</a:t>
+            </a:r>
+            <a:r>
+              <a:rPr lang="en-IE" dirty="0" err="1"/>
+              <a:t>markup</a:t>
+            </a:r>
+            <a:r>
+              <a:rPr lang="en-IE" dirty="0"/>
+              <a:t>’ strings</a:t>
+            </a:r>
+          </a:p>
+          <a:p>
+            <a:pPr lvl="1"/>
+            <a:r>
+              <a:rPr lang="en-IE" sz="2300" dirty="0"/>
+              <a:t>used to describe the logical structure of the data</a:t>
+            </a:r>
+          </a:p>
+          <a:p>
+            <a:r>
+              <a:rPr lang="en-IE" dirty="0"/>
+              <a:t>XML has many uses. For now we confine ourselves to external data representations</a:t>
+            </a:r>
+            <a:endParaRPr lang="en-IE" dirty="0">
+              <a:cs typeface="Calibri"/>
+            </a:endParaRPr>
+          </a:p>
+          <a:p>
+            <a:r>
+              <a:rPr lang="en-IE" dirty="0"/>
+              <a:t>Has many cool features including</a:t>
+            </a:r>
+          </a:p>
+          <a:p>
+            <a:pPr lvl="1"/>
+            <a:r>
+              <a:rPr lang="en-IE" dirty="0"/>
+              <a:t>Extensible</a:t>
+            </a:r>
+          </a:p>
+          <a:p>
+            <a:pPr lvl="1"/>
+            <a:r>
+              <a:rPr lang="en-IE" dirty="0"/>
+              <a:t>Textual</a:t>
+            </a:r>
+          </a:p>
+          <a:p>
+            <a:pPr lvl="1"/>
+            <a:r>
+              <a:rPr lang="en-IE" dirty="0"/>
+              <a:t>Kind of human readable and machine readable...</a:t>
+            </a:r>
+          </a:p>
+          <a:p>
+            <a:endParaRPr lang="en-IE" dirty="0"/>
+          </a:p>
+        </p:txBody>
+      </p:sp>
+    </p:spTree>
+    <p:extLst>
+      <p:ext uri="{BB962C8B-B14F-4D97-AF65-F5344CB8AC3E}">
+        <p14:creationId xmlns:p14="http://schemas.microsoft.com/office/powerpoint/2010/main" val="2782609743"/>
+      </p:ext>
+    </p:extLst>
+  </p:cSld>
+  <p:clrMapOvr>
+    <a:masterClrMapping/>
+  </p:clrMapOvr>
+</p:sld>
+</file>
+
+<file path=ppt/slides/slide22.xml><?xml version="1.0" encoding="utf-8"?>
+<p:sld xmlns:a="http://schemas.openxmlformats.org/drawingml/2006/main" xmlns:r="http://schemas.openxmlformats.org/officeDocument/2006/relationships" xmlns:p="http://schemas.openxmlformats.org/presentationml/2006/main">
+  <p:cSld>
+    <p:spTree>
+      <p:nvGrpSpPr>
+        <p:cNvPr id="1" name=""/>
+        <p:cNvGrpSpPr/>
+        <p:nvPr/>
+      </p:nvGrpSpPr>
+      <p:grpSpPr>
+        <a:xfrm>
+          <a:off x="0" y="0"/>
+          <a:ext cx="0" cy="0"/>
+          <a:chOff x="0" y="0"/>
+          <a:chExt cx="0" cy="0"/>
+        </a:xfrm>
+      </p:grpSpPr>
       <p:sp>
         <p:nvSpPr>
           <p:cNvPr id="2" name="Title 1"/>
@@ -12604,7 +13719,7 @@
 </p:sld>
 </file>
 
-<file path=ppt/slides/slide21.xml><?xml version="1.0" encoding="utf-8"?>
+<file path=ppt/slides/slide23.xml><?xml version="1.0" encoding="utf-8"?>
 <p:sld xmlns:a="http://schemas.openxmlformats.org/drawingml/2006/main" xmlns:r="http://schemas.openxmlformats.org/officeDocument/2006/relationships" xmlns:p="http://schemas.openxmlformats.org/presentationml/2006/main">
   <p:cSld>
     <p:bg>
@@ -12886,7 +14001,7 @@
 </p:sld>
 </file>
 
-<file path=ppt/slides/slide22.xml><?xml version="1.0" encoding="utf-8"?>
+<file path=ppt/slides/slide24.xml><?xml version="1.0" encoding="utf-8"?>
 <p:sld xmlns:a="http://schemas.openxmlformats.org/drawingml/2006/main" xmlns:r="http://schemas.openxmlformats.org/officeDocument/2006/relationships" xmlns:p="http://schemas.openxmlformats.org/presentationml/2006/main">
   <p:cSld>
     <p:spTree>
@@ -13161,7 +14276,7 @@
 </p:sld>
 </file>
 
-<file path=ppt/slides/slide23.xml><?xml version="1.0" encoding="utf-8"?>
+<file path=ppt/slides/slide25.xml><?xml version="1.0" encoding="utf-8"?>
 <p:sld xmlns:a="http://schemas.openxmlformats.org/drawingml/2006/main" xmlns:r="http://schemas.openxmlformats.org/officeDocument/2006/relationships" xmlns:p="http://schemas.openxmlformats.org/presentationml/2006/main">
   <p:cSld>
     <p:spTree>
@@ -13396,7 +14511,7 @@
 </p:sld>
 </file>
 
-<file path=ppt/slides/slide24.xml><?xml version="1.0" encoding="utf-8"?>
+<file path=ppt/slides/slide26.xml><?xml version="1.0" encoding="utf-8"?>
 <p:sld xmlns:a="http://schemas.openxmlformats.org/drawingml/2006/main" xmlns:r="http://schemas.openxmlformats.org/officeDocument/2006/relationships" xmlns:p="http://schemas.openxmlformats.org/presentationml/2006/main">
   <p:cSld>
     <p:bg>
@@ -15259,7 +16374,7 @@
 </p:sld>
 </file>
 
-<file path=ppt/slides/slide25.xml><?xml version="1.0" encoding="utf-8"?>
+<file path=ppt/slides/slide27.xml><?xml version="1.0" encoding="utf-8"?>
 <p:sld xmlns:a="http://schemas.openxmlformats.org/drawingml/2006/main" xmlns:r="http://schemas.openxmlformats.org/officeDocument/2006/relationships" xmlns:p="http://schemas.openxmlformats.org/presentationml/2006/main">
   <p:cSld>
     <p:spTree>
@@ -15364,116 +16479,6 @@
     <p:extLst>
       <p:ext uri="{BB962C8B-B14F-4D97-AF65-F5344CB8AC3E}">
         <p14:creationId xmlns:p14="http://schemas.microsoft.com/office/powerpoint/2010/main" val="1068845972"/>
-      </p:ext>
-    </p:extLst>
-  </p:cSld>
-  <p:clrMapOvr>
-    <a:masterClrMapping/>
-  </p:clrMapOvr>
-</p:sld>
-</file>
-
-<file path=ppt/slides/slide26.xml><?xml version="1.0" encoding="utf-8"?>
-<p:sld xmlns:a="http://schemas.openxmlformats.org/drawingml/2006/main" xmlns:r="http://schemas.openxmlformats.org/officeDocument/2006/relationships" xmlns:p="http://schemas.openxmlformats.org/presentationml/2006/main">
-  <p:cSld>
-    <p:spTree>
-      <p:nvGrpSpPr>
-        <p:cNvPr id="1" name=""/>
-        <p:cNvGrpSpPr/>
-        <p:nvPr/>
-      </p:nvGrpSpPr>
-      <p:grpSpPr>
-        <a:xfrm>
-          <a:off x="0" y="0"/>
-          <a:ext cx="0" cy="0"/>
-          <a:chOff x="0" y="0"/>
-          <a:chExt cx="0" cy="0"/>
-        </a:xfrm>
-      </p:grpSpPr>
-      <p:sp>
-        <p:nvSpPr>
-          <p:cNvPr id="2" name="Title 1"/>
-          <p:cNvSpPr>
-            <a:spLocks noGrp="1"/>
-          </p:cNvSpPr>
-          <p:nvPr>
-            <p:ph type="title"/>
-          </p:nvPr>
-        </p:nvSpPr>
-        <p:spPr/>
-        <p:txBody>
-          <a:bodyPr/>
-          <a:lstStyle/>
-          <a:p>
-            <a:r>
-              <a:rPr lang="en-US" dirty="0"/>
-              <a:t>More on HTTP</a:t>
-            </a:r>
-          </a:p>
-        </p:txBody>
-      </p:sp>
-      <p:sp>
-        <p:nvSpPr>
-          <p:cNvPr id="3" name="Content Placeholder 2"/>
-          <p:cNvSpPr>
-            <a:spLocks noGrp="1"/>
-          </p:cNvSpPr>
-          <p:nvPr>
-            <p:ph idx="1"/>
-          </p:nvPr>
-        </p:nvSpPr>
-        <p:spPr/>
-        <p:txBody>
-          <a:bodyPr vert="horz" lIns="91440" tIns="45720" rIns="91440" bIns="45720" rtlCol="0" anchor="t">
-            <a:normAutofit/>
-          </a:bodyPr>
-          <a:lstStyle/>
-          <a:p>
-            <a:r>
-              <a:rPr lang="en-US" dirty="0"/>
-              <a:t>For an extensive overview, checkout:</a:t>
-            </a:r>
-          </a:p>
-          <a:p>
-            <a:endParaRPr lang="en-US" dirty="0"/>
-          </a:p>
-          <a:p>
-            <a:pPr>
-              <a:buNone/>
-            </a:pPr>
-            <a:r>
-              <a:rPr lang="en-US" dirty="0">
-                <a:latin typeface="Calibri" charset="0"/>
-                <a:hlinkClick r:id="rId3"/>
-              </a:rPr>
-              <a:t>https://www.ntu.edu.sg/home/ehchua/programming/webprogramming/http_basics.html</a:t>
-            </a:r>
-            <a:endParaRPr lang="en-US" dirty="0">
-              <a:latin typeface="Calibri" charset="0"/>
-            </a:endParaRPr>
-          </a:p>
-          <a:p>
-            <a:pPr>
-              <a:buNone/>
-            </a:pPr>
-            <a:endParaRPr lang="en-US" dirty="0">
-              <a:cs typeface="Calibri"/>
-            </a:endParaRPr>
-          </a:p>
-          <a:p>
-            <a:pPr marL="0" indent="0">
-              <a:buNone/>
-            </a:pPr>
-            <a:endParaRPr lang="en-US" dirty="0">
-              <a:cs typeface="Calibri"/>
-            </a:endParaRPr>
-          </a:p>
-        </p:txBody>
-      </p:sp>
-    </p:spTree>
-    <p:extLst>
-      <p:ext uri="{BB962C8B-B14F-4D97-AF65-F5344CB8AC3E}">
-        <p14:creationId xmlns:p14="http://schemas.microsoft.com/office/powerpoint/2010/main" val="325595418"/>
       </p:ext>
     </p:extLst>
   </p:cSld>

--- a/topic-09-week9/unit-1/talk-01/HTTP.pptx
+++ b/topic-09-week9/unit-1/talk-01/HTTP.pptx
@@ -3195,7 +3195,7 @@
           <a:p>
             <a:fld id="{1F59DCBE-7903-4CC3-BA3A-6346FDFCF31A}" type="datetimeFigureOut">
               <a:rPr lang="en-US"/>
-              <a:t>11/10/2025</a:t>
+              <a:t>4/13/2026</a:t>
             </a:fld>
             <a:endParaRPr lang="en-US"/>
           </a:p>
@@ -4783,7 +4783,7 @@
           <a:p>
             <a:fld id="{846CE7D5-CF57-46EF-B807-FDD0502418D4}" type="datetimeFigureOut">
               <a:rPr lang="en-US" smtClean="0"/>
-              <a:t>11/10/2025</a:t>
+              <a:t>4/13/2026</a:t>
             </a:fld>
             <a:endParaRPr lang="en-US"/>
           </a:p>
@@ -4953,7 +4953,7 @@
           <a:p>
             <a:fld id="{846CE7D5-CF57-46EF-B807-FDD0502418D4}" type="datetimeFigureOut">
               <a:rPr lang="en-US" smtClean="0"/>
-              <a:t>11/10/2025</a:t>
+              <a:t>4/13/2026</a:t>
             </a:fld>
             <a:endParaRPr lang="en-US"/>
           </a:p>
@@ -5133,7 +5133,7 @@
           <a:p>
             <a:fld id="{846CE7D5-CF57-46EF-B807-FDD0502418D4}" type="datetimeFigureOut">
               <a:rPr lang="en-US" smtClean="0"/>
-              <a:t>11/10/2025</a:t>
+              <a:t>4/13/2026</a:t>
             </a:fld>
             <a:endParaRPr lang="en-US"/>
           </a:p>
@@ -5303,7 +5303,7 @@
           <a:p>
             <a:fld id="{846CE7D5-CF57-46EF-B807-FDD0502418D4}" type="datetimeFigureOut">
               <a:rPr lang="en-US" smtClean="0"/>
-              <a:t>11/10/2025</a:t>
+              <a:t>4/13/2026</a:t>
             </a:fld>
             <a:endParaRPr lang="en-US"/>
           </a:p>
@@ -5549,7 +5549,7 @@
           <a:p>
             <a:fld id="{846CE7D5-CF57-46EF-B807-FDD0502418D4}" type="datetimeFigureOut">
               <a:rPr lang="en-US" smtClean="0"/>
-              <a:t>11/10/2025</a:t>
+              <a:t>4/13/2026</a:t>
             </a:fld>
             <a:endParaRPr lang="en-US"/>
           </a:p>
@@ -5781,7 +5781,7 @@
           <a:p>
             <a:fld id="{846CE7D5-CF57-46EF-B807-FDD0502418D4}" type="datetimeFigureOut">
               <a:rPr lang="en-US" smtClean="0"/>
-              <a:t>11/10/2025</a:t>
+              <a:t>4/13/2026</a:t>
             </a:fld>
             <a:endParaRPr lang="en-US"/>
           </a:p>
@@ -6148,7 +6148,7 @@
           <a:p>
             <a:fld id="{846CE7D5-CF57-46EF-B807-FDD0502418D4}" type="datetimeFigureOut">
               <a:rPr lang="en-US" smtClean="0"/>
-              <a:t>11/10/2025</a:t>
+              <a:t>4/13/2026</a:t>
             </a:fld>
             <a:endParaRPr lang="en-US"/>
           </a:p>
@@ -6266,7 +6266,7 @@
           <a:p>
             <a:fld id="{846CE7D5-CF57-46EF-B807-FDD0502418D4}" type="datetimeFigureOut">
               <a:rPr lang="en-US" smtClean="0"/>
-              <a:t>11/10/2025</a:t>
+              <a:t>4/13/2026</a:t>
             </a:fld>
             <a:endParaRPr lang="en-US"/>
           </a:p>
@@ -6361,7 +6361,7 @@
           <a:p>
             <a:fld id="{846CE7D5-CF57-46EF-B807-FDD0502418D4}" type="datetimeFigureOut">
               <a:rPr lang="en-US" smtClean="0"/>
-              <a:t>11/10/2025</a:t>
+              <a:t>4/13/2026</a:t>
             </a:fld>
             <a:endParaRPr lang="en-US"/>
           </a:p>
@@ -6638,7 +6638,7 @@
           <a:p>
             <a:fld id="{846CE7D5-CF57-46EF-B807-FDD0502418D4}" type="datetimeFigureOut">
               <a:rPr lang="en-US" smtClean="0"/>
-              <a:t>11/10/2025</a:t>
+              <a:t>4/13/2026</a:t>
             </a:fld>
             <a:endParaRPr lang="en-US"/>
           </a:p>
@@ -6895,7 +6895,7 @@
           <a:p>
             <a:fld id="{846CE7D5-CF57-46EF-B807-FDD0502418D4}" type="datetimeFigureOut">
               <a:rPr lang="en-US" smtClean="0"/>
-              <a:t>11/10/2025</a:t>
+              <a:t>4/13/2026</a:t>
             </a:fld>
             <a:endParaRPr lang="en-US"/>
           </a:p>
@@ -7108,7 +7108,7 @@
           <a:p>
             <a:fld id="{846CE7D5-CF57-46EF-B807-FDD0502418D4}" type="datetimeFigureOut">
               <a:rPr lang="en-US" smtClean="0"/>
-              <a:t>11/10/2025</a:t>
+              <a:t>4/13/2026</a:t>
             </a:fld>
             <a:endParaRPr lang="en-US"/>
           </a:p>
@@ -8297,68 +8297,68 @@
           <a:custGeom>
             <a:avLst/>
             <a:gdLst>
-              <a:gd name="connsiteX0" fmla="*/ 0 w 3255095"/>
-              <a:gd name="connsiteY0" fmla="*/ 0 h 18288"/>
-              <a:gd name="connsiteX1" fmla="*/ 618468 w 3255095"/>
-              <a:gd name="connsiteY1" fmla="*/ 0 h 18288"/>
-              <a:gd name="connsiteX2" fmla="*/ 1269487 w 3255095"/>
-              <a:gd name="connsiteY2" fmla="*/ 0 h 18288"/>
-              <a:gd name="connsiteX3" fmla="*/ 1953057 w 3255095"/>
-              <a:gd name="connsiteY3" fmla="*/ 0 h 18288"/>
-              <a:gd name="connsiteX4" fmla="*/ 2636627 w 3255095"/>
-              <a:gd name="connsiteY4" fmla="*/ 0 h 18288"/>
-              <a:gd name="connsiteX5" fmla="*/ 3255095 w 3255095"/>
-              <a:gd name="connsiteY5" fmla="*/ 0 h 18288"/>
-              <a:gd name="connsiteX6" fmla="*/ 3255095 w 3255095"/>
-              <a:gd name="connsiteY6" fmla="*/ 18288 h 18288"/>
-              <a:gd name="connsiteX7" fmla="*/ 2538974 w 3255095"/>
-              <a:gd name="connsiteY7" fmla="*/ 18288 h 18288"/>
-              <a:gd name="connsiteX8" fmla="*/ 1822853 w 3255095"/>
-              <a:gd name="connsiteY8" fmla="*/ 18288 h 18288"/>
-              <a:gd name="connsiteX9" fmla="*/ 1171834 w 3255095"/>
-              <a:gd name="connsiteY9" fmla="*/ 18288 h 18288"/>
-              <a:gd name="connsiteX10" fmla="*/ 0 w 3255095"/>
-              <a:gd name="connsiteY10" fmla="*/ 18288 h 18288"/>
-              <a:gd name="connsiteX11" fmla="*/ 0 w 3255095"/>
-              <a:gd name="connsiteY11" fmla="*/ 0 h 18288"/>
+              <a:gd name="csX0" fmla="*/ 0 w 3255095"/>
+              <a:gd name="csY0" fmla="*/ 0 h 18288"/>
+              <a:gd name="csX1" fmla="*/ 618468 w 3255095"/>
+              <a:gd name="csY1" fmla="*/ 0 h 18288"/>
+              <a:gd name="csX2" fmla="*/ 1269487 w 3255095"/>
+              <a:gd name="csY2" fmla="*/ 0 h 18288"/>
+              <a:gd name="csX3" fmla="*/ 1953057 w 3255095"/>
+              <a:gd name="csY3" fmla="*/ 0 h 18288"/>
+              <a:gd name="csX4" fmla="*/ 2636627 w 3255095"/>
+              <a:gd name="csY4" fmla="*/ 0 h 18288"/>
+              <a:gd name="csX5" fmla="*/ 3255095 w 3255095"/>
+              <a:gd name="csY5" fmla="*/ 0 h 18288"/>
+              <a:gd name="csX6" fmla="*/ 3255095 w 3255095"/>
+              <a:gd name="csY6" fmla="*/ 18288 h 18288"/>
+              <a:gd name="csX7" fmla="*/ 2538974 w 3255095"/>
+              <a:gd name="csY7" fmla="*/ 18288 h 18288"/>
+              <a:gd name="csX8" fmla="*/ 1822853 w 3255095"/>
+              <a:gd name="csY8" fmla="*/ 18288 h 18288"/>
+              <a:gd name="csX9" fmla="*/ 1171834 w 3255095"/>
+              <a:gd name="csY9" fmla="*/ 18288 h 18288"/>
+              <a:gd name="csX10" fmla="*/ 0 w 3255095"/>
+              <a:gd name="csY10" fmla="*/ 18288 h 18288"/>
+              <a:gd name="csX11" fmla="*/ 0 w 3255095"/>
+              <a:gd name="csY11" fmla="*/ 0 h 18288"/>
             </a:gdLst>
             <a:ahLst/>
             <a:cxnLst>
               <a:cxn ang="0">
-                <a:pos x="connsiteX0" y="connsiteY0"/>
+                <a:pos x="csX0" y="csY0"/>
               </a:cxn>
               <a:cxn ang="0">
-                <a:pos x="connsiteX1" y="connsiteY1"/>
+                <a:pos x="csX1" y="csY1"/>
               </a:cxn>
               <a:cxn ang="0">
-                <a:pos x="connsiteX2" y="connsiteY2"/>
+                <a:pos x="csX2" y="csY2"/>
               </a:cxn>
               <a:cxn ang="0">
-                <a:pos x="connsiteX3" y="connsiteY3"/>
+                <a:pos x="csX3" y="csY3"/>
               </a:cxn>
               <a:cxn ang="0">
-                <a:pos x="connsiteX4" y="connsiteY4"/>
+                <a:pos x="csX4" y="csY4"/>
               </a:cxn>
               <a:cxn ang="0">
-                <a:pos x="connsiteX5" y="connsiteY5"/>
+                <a:pos x="csX5" y="csY5"/>
               </a:cxn>
               <a:cxn ang="0">
-                <a:pos x="connsiteX6" y="connsiteY6"/>
+                <a:pos x="csX6" y="csY6"/>
               </a:cxn>
               <a:cxn ang="0">
-                <a:pos x="connsiteX7" y="connsiteY7"/>
+                <a:pos x="csX7" y="csY7"/>
               </a:cxn>
               <a:cxn ang="0">
-                <a:pos x="connsiteX8" y="connsiteY8"/>
+                <a:pos x="csX8" y="csY8"/>
               </a:cxn>
               <a:cxn ang="0">
-                <a:pos x="connsiteX9" y="connsiteY9"/>
+                <a:pos x="csX9" y="csY9"/>
               </a:cxn>
               <a:cxn ang="0">
-                <a:pos x="connsiteX10" y="connsiteY10"/>
+                <a:pos x="csX10" y="csY10"/>
               </a:cxn>
               <a:cxn ang="0">
-                <a:pos x="connsiteX11" y="connsiteY11"/>
+                <a:pos x="csX11" y="csY11"/>
               </a:cxn>
             </a:cxnLst>
             <a:rect l="l" t="t" r="r" b="b"/>
@@ -10340,7 +10340,7 @@
                 <a:latin typeface="Courier New" panose="02070309020205020404" pitchFamily="49" charset="0"/>
                 <a:cs typeface="Courier New" panose="02070309020205020404" pitchFamily="49" charset="0"/>
               </a:rPr>
-              <a:t>curl -X PUT https://api.example.com/light/1  </a:t>
+              <a:t>Curl.exe -X PUT https://api.example.com/light/1  </a:t>
             </a:r>
             <a:br>
               <a:rPr lang="en-GB" sz="2400" dirty="0">
@@ -11362,7 +11362,7 @@
           <a:p>
             <a:r>
               <a:rPr lang="en-US" dirty="0"/>
-              <a:t>HTTP Post</a:t>
+              <a:t>HTTP Put</a:t>
             </a:r>
           </a:p>
         </p:txBody>
@@ -12914,7 +12914,7 @@
           <a:p>
             <a:r>
               <a:rPr lang="en-US" dirty="0"/>
-              <a:t>HTTP Post</a:t>
+              <a:t>HTTP Put</a:t>
             </a:r>
           </a:p>
         </p:txBody>
